--- a/Presentation.pptx
+++ b/Presentation.pptx
@@ -15,7 +15,7 @@
     <p:sldId id="263" r:id="rId6"/>
     <p:sldId id="267" r:id="rId7"/>
     <p:sldId id="266" r:id="rId8"/>
-    <p:sldId id="259" r:id="rId9"/>
+    <p:sldId id="273" r:id="rId9"/>
     <p:sldId id="260" r:id="rId10"/>
     <p:sldId id="261" r:id="rId11"/>
     <p:sldId id="268" r:id="rId12"/>
@@ -212,7 +212,7 @@
           <a:p>
             <a:fld id="{F214320D-9E3A-43B2-B232-402D78146534}" type="datetimeFigureOut">
               <a:rPr lang="en-CA" smtClean="0"/>
-              <a:t>2025-06-05</a:t>
+              <a:t>2025-06-25</a:t>
             </a:fld>
             <a:endParaRPr lang="en-CA"/>
           </a:p>
@@ -1281,7 +1281,7 @@
           <a:p>
             <a:fld id="{C128FA71-3A18-48C0-980F-4B68F7F63042}" type="datetime1">
               <a:rPr lang="en-US" smtClean="0"/>
-              <a:t>6/5/2025</a:t>
+              <a:t>6/25/2025</a:t>
             </a:fld>
             <a:endParaRPr lang="en-US"/>
           </a:p>
@@ -1489,7 +1489,7 @@
           <a:p>
             <a:fld id="{7104EDB3-C0E8-45F8-9E1D-1B6C8D1880C0}" type="datetime1">
               <a:rPr lang="en-US" smtClean="0"/>
-              <a:t>6/5/2025</a:t>
+              <a:t>6/25/2025</a:t>
             </a:fld>
             <a:endParaRPr lang="en-US"/>
           </a:p>
@@ -1699,7 +1699,7 @@
           <a:p>
             <a:fld id="{9CF0EC4B-54ED-4041-B552-9BA760FA3DBA}" type="datetime1">
               <a:rPr lang="en-US" smtClean="0"/>
-              <a:t>6/5/2025</a:t>
+              <a:t>6/25/2025</a:t>
             </a:fld>
             <a:endParaRPr lang="en-US"/>
           </a:p>
@@ -1897,7 +1897,7 @@
           <a:p>
             <a:fld id="{51C1210E-201E-4473-82AC-2466F5386C38}" type="datetime1">
               <a:rPr lang="en-US" smtClean="0"/>
-              <a:t>6/5/2025</a:t>
+              <a:t>6/25/2025</a:t>
             </a:fld>
             <a:endParaRPr lang="en-US"/>
           </a:p>
@@ -2175,7 +2175,7 @@
           <a:p>
             <a:fld id="{B01EA198-6CAB-4B8F-B93F-1F9C8C4B6CE7}" type="datetime1">
               <a:rPr lang="en-US" smtClean="0"/>
-              <a:t>6/5/2025</a:t>
+              <a:t>6/25/2025</a:t>
             </a:fld>
             <a:endParaRPr lang="en-US"/>
           </a:p>
@@ -2447,7 +2447,7 @@
           <a:p>
             <a:fld id="{CA06041F-4525-44D5-AA4F-332294BF1F56}" type="datetime1">
               <a:rPr lang="en-US" smtClean="0"/>
-              <a:t>6/5/2025</a:t>
+              <a:t>6/25/2025</a:t>
             </a:fld>
             <a:endParaRPr lang="en-US"/>
           </a:p>
@@ -2871,7 +2871,7 @@
           <a:p>
             <a:fld id="{F9557091-BBDF-4EB9-BA6B-2BB67AC4FC0F}" type="datetime1">
               <a:rPr lang="en-US" smtClean="0"/>
-              <a:t>6/5/2025</a:t>
+              <a:t>6/25/2025</a:t>
             </a:fld>
             <a:endParaRPr lang="en-US"/>
           </a:p>
@@ -3012,7 +3012,7 @@
           <a:p>
             <a:fld id="{2D6B226B-77A6-410C-9796-083F278E0125}" type="datetime1">
               <a:rPr lang="en-US" smtClean="0"/>
-              <a:t>6/5/2025</a:t>
+              <a:t>6/25/2025</a:t>
             </a:fld>
             <a:endParaRPr lang="en-US"/>
           </a:p>
@@ -3125,7 +3125,7 @@
           <a:p>
             <a:fld id="{A23A578B-D289-4C40-8593-3D356C49DA58}" type="datetime1">
               <a:rPr lang="en-US" smtClean="0"/>
-              <a:t>6/5/2025</a:t>
+              <a:t>6/25/2025</a:t>
             </a:fld>
             <a:endParaRPr lang="en-US"/>
           </a:p>
@@ -3444,7 +3444,7 @@
           <a:p>
             <a:fld id="{713DFAE3-14DB-48A7-A80F-80DDB072CE3D}" type="datetime1">
               <a:rPr lang="en-US" smtClean="0"/>
-              <a:t>6/5/2025</a:t>
+              <a:t>6/25/2025</a:t>
             </a:fld>
             <a:endParaRPr lang="en-US"/>
           </a:p>
@@ -3738,7 +3738,7 @@
           <a:p>
             <a:fld id="{92C5EAEF-6478-4102-8F5D-A5FE9FC97ACB}" type="datetime1">
               <a:rPr lang="en-US" smtClean="0"/>
-              <a:t>6/5/2025</a:t>
+              <a:t>6/25/2025</a:t>
             </a:fld>
             <a:endParaRPr lang="en-US"/>
           </a:p>
@@ -3979,7 +3979,7 @@
           <a:p>
             <a:fld id="{67F45AC6-C491-4585-A584-9CE2AF7D5500}" type="datetime1">
               <a:rPr lang="en-US" smtClean="0"/>
-              <a:t>6/5/2025</a:t>
+              <a:t>6/25/2025</a:t>
             </a:fld>
             <a:endParaRPr lang="en-US"/>
           </a:p>
@@ -4663,7 +4663,7 @@
             </a:r>
             <a:r>
               <a:rPr lang="en-US" sz="1800" b="0" dirty="0"/>
-              <a:t>v4</a:t>
+              <a:t>v7</a:t>
             </a:r>
             <a:br>
               <a:rPr lang="en-US" sz="5200" dirty="0"/>
@@ -4736,7 +4736,7 @@
                   </a:schemeClr>
                 </a:solidFill>
               </a:rPr>
-              <a:t>May 2025</a:t>
+              <a:t>June 2025</a:t>
             </a:r>
             <a:endParaRPr lang="en-CA" sz="1400" dirty="0">
               <a:solidFill>
@@ -4846,25 +4846,6 @@
               <a:buNone/>
             </a:pPr>
             <a:r>
-              <a:rPr lang="en-CA" sz="4400" dirty="0" err="1">
-                <a:latin typeface="Courier New" panose="02070309020205020404" pitchFamily="49" charset="0"/>
-                <a:cs typeface="Courier New" panose="02070309020205020404" pitchFamily="49" charset="0"/>
-              </a:rPr>
-              <a:t>gemini_alarms_rca_agent</a:t>
-            </a:r>
-            <a:r>
-              <a:rPr lang="en-CA" sz="4400" dirty="0">
-                <a:latin typeface="Courier New" panose="02070309020205020404" pitchFamily="49" charset="0"/>
-                <a:cs typeface="Courier New" panose="02070309020205020404" pitchFamily="49" charset="0"/>
-              </a:rPr>
-              <a:t> receiving messages ...</a:t>
-            </a:r>
-          </a:p>
-          <a:p>
-            <a:pPr marL="0" indent="0">
-              <a:buNone/>
-            </a:pPr>
-            <a:r>
               <a:rPr lang="en-CA" sz="5200" dirty="0">
                 <a:latin typeface="Courier New" panose="02070309020205020404" pitchFamily="49" charset="0"/>
                 <a:cs typeface="Courier New" panose="02070309020205020404" pitchFamily="49" charset="0"/>
@@ -5247,7 +5228,7 @@
         </p:nvSpPr>
         <p:spPr>
           <a:xfrm>
-            <a:off x="546659" y="5599522"/>
+            <a:off x="612647" y="5307046"/>
             <a:ext cx="10653579" cy="1036948"/>
           </a:xfrm>
           <a:prstGeom prst="rect">
@@ -5386,7 +5367,7 @@
               <a:rPr lang="en-CA" dirty="0">
                 <a:cs typeface="Courier New" panose="02070309020205020404" pitchFamily="49" charset="0"/>
               </a:rPr>
-              <a:t>Enhance NSP FM application?</a:t>
+              <a:t>NSP?</a:t>
             </a:r>
           </a:p>
           <a:p>
@@ -5395,6 +5376,15 @@
               <a:rPr lang="en-CA" dirty="0">
                 <a:cs typeface="Courier New" panose="02070309020205020404" pitchFamily="49" charset="0"/>
               </a:rPr>
+              <a:t>Enhance NSP FM application</a:t>
+            </a:r>
+          </a:p>
+          <a:p>
+            <a:pPr lvl="3"/>
+            <a:r>
+              <a:rPr lang="en-CA" dirty="0">
+                <a:cs typeface="Courier New" panose="02070309020205020404" pitchFamily="49" charset="0"/>
+              </a:rPr>
               <a:t>New API for Agent to </a:t>
             </a:r>
             <a:r>
@@ -5411,7 +5401,7 @@
             </a:r>
           </a:p>
           <a:p>
-            <a:pPr lvl="3"/>
+            <a:pPr lvl="4"/>
             <a:r>
               <a:rPr lang="en-CA" dirty="0" err="1">
                 <a:cs typeface="Courier New" panose="02070309020205020404" pitchFamily="49" charset="0"/>
@@ -5462,7 +5452,7 @@
               <a:rPr lang="en-CA" dirty="0">
                 <a:cs typeface="Courier New" panose="02070309020205020404" pitchFamily="49" charset="0"/>
               </a:rPr>
-              <a:t>Enhance NBI Kafka for OSS consumption?</a:t>
+              <a:t>OSS?</a:t>
             </a:r>
           </a:p>
           <a:p>
@@ -5471,7 +5461,16 @@
               <a:rPr lang="en-CA" dirty="0">
                 <a:cs typeface="Courier New" panose="02070309020205020404" pitchFamily="49" charset="0"/>
               </a:rPr>
-              <a:t> </a:t>
+              <a:t>Enhance NBI Kafka for OSS consumption</a:t>
+            </a:r>
+          </a:p>
+          <a:p>
+            <a:pPr lvl="2"/>
+            <a:r>
+              <a:rPr lang="en-CA" dirty="0">
+                <a:cs typeface="Courier New" panose="02070309020205020404" pitchFamily="49" charset="0"/>
+              </a:rPr>
+              <a:t> 	</a:t>
             </a:r>
             <a:r>
               <a:rPr lang="en-CA" dirty="0"/>
@@ -5479,7 +5478,7 @@
             </a:r>
           </a:p>
           <a:p>
-            <a:pPr lvl="3"/>
+            <a:pPr lvl="4"/>
             <a:r>
               <a:rPr lang="en-CA" dirty="0">
                 <a:cs typeface="Courier New" panose="02070309020205020404" pitchFamily="49" charset="0"/>
@@ -5490,9 +5489,15 @@
               <a:rPr lang="en-CA" dirty="0"/>
               <a:t>NSP-FAULT-YANG  and NSP-FAULT-RCA-YANG</a:t>
             </a:r>
-            <a:endParaRPr lang="en-CA" dirty="0">
-              <a:cs typeface="Courier New" panose="02070309020205020404" pitchFamily="49" charset="0"/>
-            </a:endParaRPr>
+          </a:p>
+          <a:p>
+            <a:pPr lvl="2"/>
+            <a:r>
+              <a:rPr lang="en-CA" dirty="0">
+                <a:cs typeface="Courier New" panose="02070309020205020404" pitchFamily="49" charset="0"/>
+              </a:rPr>
+              <a:t>RCA results will not be available in NSP</a:t>
+            </a:r>
           </a:p>
           <a:p>
             <a:pPr marL="228600" lvl="1" indent="0">
@@ -5874,10 +5879,10 @@
       </p:grpSpPr>
       <p:pic>
         <p:nvPicPr>
-          <p:cNvPr id="5" name="Picture 4" descr="A diagram of a chatbot&#10;&#10;AI-generated content may be incorrect.">
-            <a:extLst>
-              <a:ext uri="{FF2B5EF4-FFF2-40B4-BE49-F238E27FC236}">
-                <a16:creationId xmlns:a16="http://schemas.microsoft.com/office/drawing/2014/main" id="{C94EF39B-4333-814E-96E8-545265B2BE1D}"/>
+          <p:cNvPr id="6" name="Picture 5" descr="A diagram of a chatbot&#10;&#10;AI-generated content may be incorrect.">
+            <a:extLst>
+              <a:ext uri="{FF2B5EF4-FFF2-40B4-BE49-F238E27FC236}">
+                <a16:creationId xmlns:a16="http://schemas.microsoft.com/office/drawing/2014/main" id="{9C0E9218-4261-E0D3-379D-2EC412D8CD80}"/>
               </a:ext>
             </a:extLst>
           </p:cNvPr>
@@ -5900,8 +5905,8 @@
         </p:blipFill>
         <p:spPr>
           <a:xfrm>
-            <a:off x="4760876" y="2618738"/>
-            <a:ext cx="5963920" cy="4472941"/>
+            <a:off x="7152634" y="2570480"/>
+            <a:ext cx="5154511" cy="3865884"/>
           </a:xfrm>
           <a:prstGeom prst="rect">
             <a:avLst/>
@@ -6000,52 +6005,70 @@
               <a:rPr lang="en-US" dirty="0">
                 <a:cs typeface="Courier New" panose="02070309020205020404" pitchFamily="49" charset="0"/>
               </a:rPr>
-              <a:t>v5 -&gt; </a:t>
-            </a:r>
+              <a:t>v5 </a:t>
+            </a:r>
+            <a:r>
+              <a:rPr lang="en-US">
+                <a:cs typeface="Courier New" panose="02070309020205020404" pitchFamily="49" charset="0"/>
+              </a:rPr>
+              <a:t>-&gt; </a:t>
+            </a:r>
+            <a:r>
+              <a:rPr lang="en-US" b="1">
+                <a:cs typeface="Courier New" panose="02070309020205020404" pitchFamily="49" charset="0"/>
+              </a:rPr>
+              <a:t>v6 -&gt; v7</a:t>
+            </a:r>
+            <a:endParaRPr lang="en-US" b="1" dirty="0">
+              <a:cs typeface="Courier New" panose="02070309020205020404" pitchFamily="49" charset="0"/>
+            </a:endParaRPr>
+          </a:p>
+          <a:p>
+            <a:pPr lvl="1"/>
             <a:r>
               <a:rPr lang="en-US" b="1" dirty="0">
                 <a:cs typeface="Courier New" panose="02070309020205020404" pitchFamily="49" charset="0"/>
               </a:rPr>
-              <a:t>v6</a:t>
-            </a:r>
-          </a:p>
-          <a:p>
-            <a:pPr lvl="1"/>
+              <a:t>Added </a:t>
+            </a:r>
+            <a:r>
+              <a:rPr lang="en-US" dirty="0" err="1">
+                <a:cs typeface="Courier New" panose="02070309020205020404" pitchFamily="49" charset="0"/>
+              </a:rPr>
+              <a:t>LangGraph</a:t>
+            </a:r>
+            <a:r>
+              <a:rPr lang="en-US" dirty="0">
+                <a:cs typeface="Courier New" panose="02070309020205020404" pitchFamily="49" charset="0"/>
+              </a:rPr>
+              <a:t> to support multi-turn </a:t>
+            </a:r>
+            <a:r>
+              <a:rPr lang="en-US" dirty="0" err="1">
+                <a:cs typeface="Courier New" panose="02070309020205020404" pitchFamily="49" charset="0"/>
+              </a:rPr>
+              <a:t>ReAct</a:t>
+            </a:r>
+            <a:r>
+              <a:rPr lang="en-US" dirty="0">
+                <a:cs typeface="Courier New" panose="02070309020205020404" pitchFamily="49" charset="0"/>
+              </a:rPr>
+              <a:t> loops (ongoing)</a:t>
+            </a:r>
+          </a:p>
+          <a:p>
+            <a:pPr lvl="2"/>
             <a:r>
               <a:rPr lang="en-US" b="1" dirty="0">
                 <a:cs typeface="Courier New" panose="02070309020205020404" pitchFamily="49" charset="0"/>
               </a:rPr>
-              <a:t>Added </a:t>
-            </a:r>
-            <a:r>
-              <a:rPr lang="en-US" dirty="0" err="1">
-                <a:cs typeface="Courier New" panose="02070309020205020404" pitchFamily="49" charset="0"/>
-              </a:rPr>
-              <a:t>LangGraph</a:t>
+              <a:t>TODO: </a:t>
             </a:r>
             <a:r>
               <a:rPr lang="en-US" dirty="0">
                 <a:cs typeface="Courier New" panose="02070309020205020404" pitchFamily="49" charset="0"/>
               </a:rPr>
-              <a:t> to support multi-turn </a:t>
-            </a:r>
-            <a:r>
-              <a:rPr lang="en-US" dirty="0" err="1">
-                <a:cs typeface="Courier New" panose="02070309020205020404" pitchFamily="49" charset="0"/>
-              </a:rPr>
-              <a:t>ReAct</a:t>
-            </a:r>
-            <a:r>
-              <a:rPr lang="en-US" dirty="0">
-                <a:cs typeface="Courier New" panose="02070309020205020404" pitchFamily="49" charset="0"/>
-              </a:rPr>
-              <a:t> loops </a:t>
-            </a:r>
-            <a:r>
-              <a:rPr lang="en-US">
-                <a:cs typeface="Courier New" panose="02070309020205020404" pitchFamily="49" charset="0"/>
-              </a:rPr>
-              <a:t>(ongoing)</a:t>
+              <a:t>Handle parallel NE chains</a:t>
             </a:r>
             <a:endParaRPr lang="en-US" b="1" dirty="0">
               <a:cs typeface="Courier New" panose="02070309020205020404" pitchFamily="49" charset="0"/>
@@ -6533,7 +6556,7 @@
                 <a:latin typeface="Courier New" panose="02070309020205020404" pitchFamily="49" charset="0"/>
                 <a:cs typeface="Courier New" panose="02070309020205020404" pitchFamily="49" charset="0"/>
               </a:rPr>
-              <a:t>💡reasoning=sim234_225 interface 1/1/c3/1 is down because it is shutdown. Because sim234_225 interface 1/1/c3/1 is physically connected to sim234_236 interface 1/1/c3/1, this likely caused toSR236 interface 1/1/c3/1 to become inoperable.</a:t>
+              <a:t>💡reasoning=interface 1/1/c3/1 on sim234_225 is down because it is shutdown. Interface 1/1/c3/1 on sim234_225 is physically connected to interface 1/1/c3/1 sim234_236. Shutting down the interface on sim234_225 likely caused the connected interface on toSR236 to become inoperable.</a:t>
             </a:r>
             <a:r>
               <a:rPr lang="en-CA" sz="1300" dirty="0">
@@ -6709,6 +6732,60 @@
               <a:rPr lang="en-US" dirty="0">
                 <a:cs typeface="Courier New" panose="02070309020205020404" pitchFamily="49" charset="0"/>
               </a:rPr>
+              <a:t>RCA of </a:t>
+            </a:r>
+            <a:r>
+              <a:rPr lang="en-US" u="sng" dirty="0">
+                <a:cs typeface="Courier New" panose="02070309020205020404" pitchFamily="49" charset="0"/>
+              </a:rPr>
+              <a:t>all</a:t>
+            </a:r>
+            <a:r>
+              <a:rPr lang="en-US" dirty="0">
+                <a:cs typeface="Courier New" panose="02070309020205020404" pitchFamily="49" charset="0"/>
+              </a:rPr>
+              <a:t> active alarms</a:t>
+            </a:r>
+          </a:p>
+          <a:p>
+            <a:pPr lvl="1"/>
+            <a:r>
+              <a:rPr lang="en-US" dirty="0">
+                <a:cs typeface="Courier New" panose="02070309020205020404" pitchFamily="49" charset="0"/>
+              </a:rPr>
+              <a:t>On-demand or periodic</a:t>
+            </a:r>
+          </a:p>
+          <a:p>
+            <a:pPr marL="457200" indent="-457200">
+              <a:buFont typeface="+mj-lt"/>
+              <a:buAutoNum type="arabicPeriod" startAt="3"/>
+            </a:pPr>
+            <a:r>
+              <a:rPr lang="en-US" dirty="0">
+                <a:cs typeface="Courier New" panose="02070309020205020404" pitchFamily="49" charset="0"/>
+              </a:rPr>
+              <a:t>Cache results/data from tools calls for future look-ups</a:t>
+            </a:r>
+          </a:p>
+          <a:p>
+            <a:pPr lvl="1"/>
+            <a:r>
+              <a:rPr lang="en-US" dirty="0">
+                <a:cs typeface="Courier New" panose="02070309020205020404" pitchFamily="49" charset="0"/>
+              </a:rPr>
+              <a:t>Enhanced performance</a:t>
+            </a:r>
+          </a:p>
+          <a:p>
+            <a:pPr marL="457200" indent="-457200">
+              <a:buFont typeface="+mj-lt"/>
+              <a:buAutoNum type="arabicPeriod" startAt="3"/>
+            </a:pPr>
+            <a:r>
+              <a:rPr lang="en-US" dirty="0">
+                <a:cs typeface="Courier New" panose="02070309020205020404" pitchFamily="49" charset="0"/>
+              </a:rPr>
               <a:t>Integrate with Model Context Protocol (MCP) </a:t>
             </a:r>
             <a:endParaRPr lang="en-CA" dirty="0">
@@ -6863,7 +6940,7 @@
             <a:pPr lvl="2"/>
             <a:r>
               <a:rPr lang="en-CA" dirty="0"/>
-              <a:t>2.0 Flash</a:t>
+              <a:t>2.5 Flash</a:t>
             </a:r>
           </a:p>
           <a:p>
@@ -6933,10 +7010,10 @@
       </p:sp>
       <p:pic>
         <p:nvPicPr>
-          <p:cNvPr id="8" name="Picture 7" descr="A screenshot of a computer">
-            <a:extLst>
-              <a:ext uri="{FF2B5EF4-FFF2-40B4-BE49-F238E27FC236}">
-                <a16:creationId xmlns:a16="http://schemas.microsoft.com/office/drawing/2014/main" id="{A263EFE0-46AE-0FA6-8695-BAFAE7F02085}"/>
+          <p:cNvPr id="4" name="Picture 3" descr="A screenshot of a computer&#10;&#10;AI-generated content may be incorrect.">
+            <a:extLst>
+              <a:ext uri="{FF2B5EF4-FFF2-40B4-BE49-F238E27FC236}">
+                <a16:creationId xmlns:a16="http://schemas.microsoft.com/office/drawing/2014/main" id="{2CD201E3-3C4F-074F-D0EE-EE35F6635437}"/>
               </a:ext>
             </a:extLst>
           </p:cNvPr>
@@ -6959,8 +7036,8 @@
         </p:blipFill>
         <p:spPr>
           <a:xfrm>
-            <a:off x="1524599" y="669675"/>
-            <a:ext cx="9410101" cy="6078788"/>
+            <a:off x="2024706" y="895478"/>
+            <a:ext cx="8643152" cy="5793646"/>
           </a:xfrm>
           <a:prstGeom prst="rect">
             <a:avLst/>
@@ -8576,7 +8653,15 @@
             </a:r>
             <a:r>
               <a:rPr lang="en-US" sz="1800" b="0" dirty="0"/>
-              <a:t> Tools </a:t>
+              <a:t> Tools + </a:t>
+            </a:r>
+            <a:r>
+              <a:rPr lang="en-US" sz="1800" b="0" dirty="0" err="1"/>
+              <a:t>LangGraph</a:t>
+            </a:r>
+            <a:r>
+              <a:rPr lang="en-US" sz="1800" b="0" dirty="0"/>
+              <a:t> </a:t>
             </a:r>
             <a:endParaRPr lang="en-CA" b="0" dirty="0"/>
           </a:p>
@@ -9078,7 +9163,13 @@
   <p:cSld>
     <p:spTree>
       <p:nvGrpSpPr>
-        <p:cNvPr id="1" name=""/>
+        <p:cNvPr id="1" name="">
+          <a:extLst>
+            <a:ext uri="{FF2B5EF4-FFF2-40B4-BE49-F238E27FC236}">
+              <a16:creationId xmlns:a16="http://schemas.microsoft.com/office/drawing/2014/main" id="{CDAC2660-546B-9685-44D8-91F39CD5268E}"/>
+            </a:ext>
+          </a:extLst>
+        </p:cNvPr>
         <p:cNvGrpSpPr/>
         <p:nvPr/>
       </p:nvGrpSpPr>
@@ -9095,7 +9186,7 @@
           <p:cNvPr id="2" name="Title 1">
             <a:extLst>
               <a:ext uri="{FF2B5EF4-FFF2-40B4-BE49-F238E27FC236}">
-                <a16:creationId xmlns:a16="http://schemas.microsoft.com/office/drawing/2014/main" id="{85ACC229-B643-785E-F22F-8BD59E7276A6}"/>
+                <a16:creationId xmlns:a16="http://schemas.microsoft.com/office/drawing/2014/main" id="{0D85CD75-9E3C-EFF1-FB6C-0294B5C73A05}"/>
               </a:ext>
             </a:extLst>
           </p:cNvPr>
@@ -9122,7 +9213,7 @@
               <a:rPr lang="en-US" sz="1800" b="0" dirty="0"/>
               <a:t>Real Output #1</a:t>
             </a:r>
-            <a:endParaRPr lang="en-CA" b="0" dirty="0"/>
+            <a:endParaRPr lang="en-CA" sz="1800" b="0" dirty="0"/>
           </a:p>
         </p:txBody>
       </p:sp>
@@ -9131,7 +9222,7 @@
           <p:cNvPr id="3" name="Content Placeholder 2">
             <a:extLst>
               <a:ext uri="{FF2B5EF4-FFF2-40B4-BE49-F238E27FC236}">
-                <a16:creationId xmlns:a16="http://schemas.microsoft.com/office/drawing/2014/main" id="{97A9C6E7-A936-4F2A-9B10-4D8EB9E2EF8B}"/>
+                <a16:creationId xmlns:a16="http://schemas.microsoft.com/office/drawing/2014/main" id="{F0B3465B-8681-757F-6294-FE8B40D587ED}"/>
               </a:ext>
             </a:extLst>
           </p:cNvPr>
@@ -9142,10 +9233,15 @@
             <p:ph idx="1"/>
           </p:nvPr>
         </p:nvSpPr>
-        <p:spPr/>
+        <p:spPr>
+          <a:xfrm>
+            <a:off x="612648" y="1715532"/>
+            <a:ext cx="10653579" cy="4593828"/>
+          </a:xfrm>
+        </p:spPr>
         <p:txBody>
           <a:bodyPr>
-            <a:normAutofit/>
+            <a:normAutofit fontScale="47500" lnSpcReduction="20000"/>
           </a:bodyPr>
           <a:lstStyle/>
           <a:p>
@@ -9153,18 +9249,28 @@
               <a:buNone/>
             </a:pPr>
             <a:r>
-              <a:rPr lang="en-CA" sz="1000" dirty="0" err="1">
-                <a:latin typeface="Courier New" panose="02070309020205020404" pitchFamily="49" charset="0"/>
-                <a:cs typeface="Courier New" panose="02070309020205020404" pitchFamily="49" charset="0"/>
-              </a:rPr>
-              <a:t>gemini_alarms_rca_agent</a:t>
-            </a:r>
-            <a:r>
-              <a:rPr lang="en-CA" sz="1000" dirty="0">
-                <a:latin typeface="Courier New" panose="02070309020205020404" pitchFamily="49" charset="0"/>
-                <a:cs typeface="Courier New" panose="02070309020205020404" pitchFamily="49" charset="0"/>
-              </a:rPr>
-              <a:t> receiving messages ...</a:t>
+              <a:rPr lang="en-CA" dirty="0"/>
+              <a:t>2025-06-16T19:47:43.456347478Z | </a:t>
+            </a:r>
+            <a:r>
+              <a:rPr lang="en-CA" b="1" dirty="0"/>
+              <a:t>sim234_225</a:t>
+            </a:r>
+            <a:r>
+              <a:rPr lang="en-CA" dirty="0"/>
+              <a:t> | 2001::225 | fdn:app:mdm-ami-cmodel:2001::225:equipment:Equipment:/port[</a:t>
+            </a:r>
+            <a:r>
+              <a:rPr lang="en-CA" b="1" dirty="0"/>
+              <a:t>port-id='1/1/c2/1'</a:t>
+            </a:r>
+            <a:r>
+              <a:rPr lang="en-CA" dirty="0"/>
+              <a:t>] | </a:t>
+            </a:r>
+            <a:r>
+              <a:rPr lang="en-CA" b="1" dirty="0"/>
+              <a:t>Interface 1/1/c2/1 is not operational</a:t>
             </a:r>
           </a:p>
           <a:p>
@@ -9172,46 +9278,28 @@
               <a:buNone/>
             </a:pPr>
             <a:r>
-              <a:rPr lang="en-CA" sz="1300" dirty="0">
-                <a:latin typeface="Courier New" panose="02070309020205020404" pitchFamily="49" charset="0"/>
-                <a:cs typeface="Courier New" panose="02070309020205020404" pitchFamily="49" charset="0"/>
-              </a:rPr>
-              <a:t>2025-05-20T19:20:18.368294936Z | </a:t>
-            </a:r>
-            <a:r>
-              <a:rPr lang="en-CA" sz="1300" b="1" dirty="0">
-                <a:latin typeface="Courier New" panose="02070309020205020404" pitchFamily="49" charset="0"/>
-                <a:cs typeface="Courier New" panose="02070309020205020404" pitchFamily="49" charset="0"/>
-              </a:rPr>
+              <a:rPr lang="en-CA" dirty="0"/>
+              <a:t>2025-06-16T19:47:43.466153190Z | </a:t>
+            </a:r>
+            <a:r>
+              <a:rPr lang="en-CA" b="1" dirty="0"/>
               <a:t>sim234_225</a:t>
             </a:r>
             <a:r>
-              <a:rPr lang="en-CA" sz="1300" dirty="0">
-                <a:latin typeface="Courier New" panose="02070309020205020404" pitchFamily="49" charset="0"/>
-                <a:cs typeface="Courier New" panose="02070309020205020404" pitchFamily="49" charset="0"/>
-              </a:rPr>
-              <a:t> | fdn:app:mdm-ami-cmodel:2001::225:equipment:Equipment:/port[</a:t>
-            </a:r>
-            <a:r>
-              <a:rPr lang="en-CA" sz="1300" b="1" dirty="0">
-                <a:latin typeface="Courier New" panose="02070309020205020404" pitchFamily="49" charset="0"/>
-                <a:cs typeface="Courier New" panose="02070309020205020404" pitchFamily="49" charset="0"/>
-              </a:rPr>
-              <a:t>port-id='1/1/c2/1'</a:t>
-            </a:r>
-            <a:r>
-              <a:rPr lang="en-CA" sz="1300" dirty="0">
-                <a:latin typeface="Courier New" panose="02070309020205020404" pitchFamily="49" charset="0"/>
-                <a:cs typeface="Courier New" panose="02070309020205020404" pitchFamily="49" charset="0"/>
-              </a:rPr>
-              <a:t>] | </a:t>
-            </a:r>
-            <a:r>
-              <a:rPr lang="en-CA" sz="1300" b="1" dirty="0">
-                <a:latin typeface="Courier New" panose="02070309020205020404" pitchFamily="49" charset="0"/>
-                <a:cs typeface="Courier New" panose="02070309020205020404" pitchFamily="49" charset="0"/>
-              </a:rPr>
-              <a:t>Interface 1/1/c2/1 is not operational</a:t>
+              <a:rPr lang="en-CA" dirty="0"/>
+              <a:t> | 2001::225 | fdn:app:mdm-ami-cmodel:2001::225:/</a:t>
+            </a:r>
+            <a:r>
+              <a:rPr lang="en-CA" dirty="0" err="1"/>
+              <a:t>openconfig-network-instance:network-instances</a:t>
+            </a:r>
+            <a:r>
+              <a:rPr lang="en-CA" dirty="0"/>
+              <a:t>/network-instance/interfaces/interface:/router[router-name='Base']/interface[interface-name='toVMX226'] | </a:t>
+            </a:r>
+            <a:r>
+              <a:rPr lang="en-CA" b="1" dirty="0"/>
+              <a:t>Interface toVMX226 is not operational</a:t>
             </a:r>
           </a:p>
           <a:p>
@@ -9219,59 +9307,35 @@
               <a:buNone/>
             </a:pPr>
             <a:r>
-              <a:rPr lang="en-CA" sz="1300" dirty="0">
-                <a:latin typeface="Courier New" panose="02070309020205020404" pitchFamily="49" charset="0"/>
-                <a:cs typeface="Courier New" panose="02070309020205020404" pitchFamily="49" charset="0"/>
-              </a:rPr>
-              <a:t>2025-05-20T19:20:18.400111080Z | </a:t>
-            </a:r>
-            <a:r>
-              <a:rPr lang="en-CA" sz="1300" b="1" dirty="0">
-                <a:latin typeface="Courier New" panose="02070309020205020404" pitchFamily="49" charset="0"/>
-                <a:cs typeface="Courier New" panose="02070309020205020404" pitchFamily="49" charset="0"/>
-              </a:rPr>
+              <a:rPr lang="en-CA" dirty="0"/>
+              <a:t>2025-06-16T19:47:43.491736666Z | </a:t>
+            </a:r>
+            <a:r>
+              <a:rPr lang="en-CA" b="1" dirty="0"/>
               <a:t>sim234_225</a:t>
             </a:r>
             <a:r>
-              <a:rPr lang="en-CA" sz="1300" dirty="0">
-                <a:latin typeface="Courier New" panose="02070309020205020404" pitchFamily="49" charset="0"/>
-                <a:cs typeface="Courier New" panose="02070309020205020404" pitchFamily="49" charset="0"/>
-              </a:rPr>
-              <a:t> | fdn:app:mdm-ami-cmodel:2001::225:service:Site:/service[</a:t>
-            </a:r>
-            <a:r>
-              <a:rPr lang="en-CA" sz="1300" b="1" dirty="0">
-                <a:latin typeface="Courier New" panose="02070309020205020404" pitchFamily="49" charset="0"/>
-                <a:cs typeface="Courier New" panose="02070309020205020404" pitchFamily="49" charset="0"/>
-              </a:rPr>
+              <a:rPr lang="en-CA" dirty="0"/>
+              <a:t> | 2001::225 | fdn:app:mdm-ami-cmodel:2001::225:service:Site:/service[</a:t>
+            </a:r>
+            <a:r>
+              <a:rPr lang="en-CA" b="1" dirty="0"/>
               <a:t>service-id='411'</a:t>
             </a:r>
             <a:r>
-              <a:rPr lang="en-CA" sz="1300" dirty="0">
-                <a:latin typeface="Courier New" panose="02070309020205020404" pitchFamily="49" charset="0"/>
-                <a:cs typeface="Courier New" panose="02070309020205020404" pitchFamily="49" charset="0"/>
-              </a:rPr>
+              <a:rPr lang="en-CA" dirty="0"/>
               <a:t>] | </a:t>
             </a:r>
             <a:r>
-              <a:rPr lang="en-CA" sz="1300" b="1" dirty="0">
-                <a:latin typeface="Courier New" panose="02070309020205020404" pitchFamily="49" charset="0"/>
-                <a:cs typeface="Courier New" panose="02070309020205020404" pitchFamily="49" charset="0"/>
-              </a:rPr>
+              <a:rPr lang="en-CA" b="1" dirty="0"/>
               <a:t>Interface </a:t>
             </a:r>
             <a:r>
-              <a:rPr lang="en-CA" sz="1300" b="1" dirty="0" err="1">
-                <a:latin typeface="Courier New" panose="02070309020205020404" pitchFamily="49" charset="0"/>
-                <a:cs typeface="Courier New" panose="02070309020205020404" pitchFamily="49" charset="0"/>
-              </a:rPr>
+              <a:rPr lang="en-CA" b="1" dirty="0" err="1"/>
               <a:t>toCE</a:t>
             </a:r>
             <a:r>
-              <a:rPr lang="en-CA" sz="1300" b="1" dirty="0">
-                <a:latin typeface="Courier New" panose="02070309020205020404" pitchFamily="49" charset="0"/>
-                <a:cs typeface="Courier New" panose="02070309020205020404" pitchFamily="49" charset="0"/>
-              </a:rPr>
+              <a:rPr lang="en-CA" b="1" dirty="0"/>
               <a:t> is not operational</a:t>
             </a:r>
           </a:p>
@@ -9280,116 +9344,36 @@
               <a:buNone/>
             </a:pPr>
             <a:r>
-              <a:rPr lang="en-CA" sz="1300" dirty="0">
-                <a:latin typeface="Courier New" panose="02070309020205020404" pitchFamily="49" charset="0"/>
-                <a:cs typeface="Courier New" panose="02070309020205020404" pitchFamily="49" charset="0"/>
-              </a:rPr>
-              <a:t>2025-05-20T19:20:18.408108809Z | </a:t>
-            </a:r>
-            <a:r>
-              <a:rPr lang="en-CA" sz="1300" b="1" dirty="0">
-                <a:latin typeface="Courier New" panose="02070309020205020404" pitchFamily="49" charset="0"/>
-                <a:cs typeface="Courier New" panose="02070309020205020404" pitchFamily="49" charset="0"/>
-              </a:rPr>
+              <a:rPr lang="en-CA" dirty="0"/>
+              <a:t>2025-06-16T19:47:43.492112491Z | </a:t>
+            </a:r>
+            <a:r>
+              <a:rPr lang="en-CA" b="1" dirty="0"/>
               <a:t>sim234_225</a:t>
             </a:r>
             <a:r>
-              <a:rPr lang="en-CA" sz="1300" dirty="0">
-                <a:latin typeface="Courier New" panose="02070309020205020404" pitchFamily="49" charset="0"/>
-                <a:cs typeface="Courier New" panose="02070309020205020404" pitchFamily="49" charset="0"/>
-              </a:rPr>
-              <a:t> | fdn:app:mdm-ami-cmodel:2001::225:/</a:t>
-            </a:r>
-            <a:r>
-              <a:rPr lang="en-CA" sz="1300" dirty="0" err="1">
-                <a:latin typeface="Courier New" panose="02070309020205020404" pitchFamily="49" charset="0"/>
-                <a:cs typeface="Courier New" panose="02070309020205020404" pitchFamily="49" charset="0"/>
-              </a:rPr>
+              <a:rPr lang="en-CA" dirty="0"/>
+              <a:t> | 2001::225 | fdn:app:mdm-ami-cmodel:2001::225:/</a:t>
+            </a:r>
+            <a:r>
+              <a:rPr lang="en-CA" dirty="0" err="1"/>
               <a:t>openconfig-network-instance:network-instances</a:t>
             </a:r>
             <a:r>
-              <a:rPr lang="en-CA" sz="1300" dirty="0">
-                <a:latin typeface="Courier New" panose="02070309020205020404" pitchFamily="49" charset="0"/>
-                <a:cs typeface="Courier New" panose="02070309020205020404" pitchFamily="49" charset="0"/>
-              </a:rPr>
-              <a:t>/network-instance/protocols/protocol/</a:t>
-            </a:r>
-            <a:r>
-              <a:rPr lang="en-CA" sz="1300" dirty="0" err="1">
-                <a:latin typeface="Courier New" panose="02070309020205020404" pitchFamily="49" charset="0"/>
-                <a:cs typeface="Courier New" panose="02070309020205020404" pitchFamily="49" charset="0"/>
-              </a:rPr>
-              <a:t>bgp</a:t>
-            </a:r>
-            <a:r>
-              <a:rPr lang="en-CA" sz="1300" dirty="0">
-                <a:latin typeface="Courier New" panose="02070309020205020404" pitchFamily="49" charset="0"/>
-                <a:cs typeface="Courier New" panose="02070309020205020404" pitchFamily="49" charset="0"/>
-              </a:rPr>
-              <a:t>/neighbors/neighbor/state:/service[</a:t>
-            </a:r>
-            <a:r>
-              <a:rPr lang="en-CA" sz="1300" b="1" dirty="0">
-                <a:latin typeface="Courier New" panose="02070309020205020404" pitchFamily="49" charset="0"/>
-                <a:cs typeface="Courier New" panose="02070309020205020404" pitchFamily="49" charset="0"/>
-              </a:rPr>
-              <a:t>service-id='411'</a:t>
-            </a:r>
-            <a:r>
-              <a:rPr lang="en-CA" sz="1300" dirty="0">
-                <a:latin typeface="Courier New" panose="02070309020205020404" pitchFamily="49" charset="0"/>
-                <a:cs typeface="Courier New" panose="02070309020205020404" pitchFamily="49" charset="0"/>
-              </a:rPr>
-              <a:t>]/</a:t>
-            </a:r>
-            <a:r>
-              <a:rPr lang="en-CA" sz="1300" dirty="0" err="1">
-                <a:latin typeface="Courier New" panose="02070309020205020404" pitchFamily="49" charset="0"/>
-                <a:cs typeface="Courier New" panose="02070309020205020404" pitchFamily="49" charset="0"/>
-              </a:rPr>
-              <a:t>bgp</a:t>
-            </a:r>
-            <a:r>
-              <a:rPr lang="en-CA" sz="1300" dirty="0">
-                <a:latin typeface="Courier New" panose="02070309020205020404" pitchFamily="49" charset="0"/>
-                <a:cs typeface="Courier New" panose="02070309020205020404" pitchFamily="49" charset="0"/>
-              </a:rPr>
-              <a:t>/neighbor[</a:t>
-            </a:r>
-            <a:r>
-              <a:rPr lang="en-CA" sz="1300" dirty="0" err="1">
-                <a:latin typeface="Courier New" panose="02070309020205020404" pitchFamily="49" charset="0"/>
-                <a:cs typeface="Courier New" panose="02070309020205020404" pitchFamily="49" charset="0"/>
-              </a:rPr>
-              <a:t>ip</a:t>
-            </a:r>
-            <a:r>
-              <a:rPr lang="en-CA" sz="1300" dirty="0">
-                <a:latin typeface="Courier New" panose="02070309020205020404" pitchFamily="49" charset="0"/>
-                <a:cs typeface="Courier New" panose="02070309020205020404" pitchFamily="49" charset="0"/>
-              </a:rPr>
-              <a:t>-address='10.41.1.2'] | (ASN 200) VR 7: </a:t>
-            </a:r>
-            <a:r>
-              <a:rPr lang="en-CA" sz="1300" b="1" dirty="0">
-                <a:latin typeface="Courier New" panose="02070309020205020404" pitchFamily="49" charset="0"/>
-                <a:cs typeface="Courier New" panose="02070309020205020404" pitchFamily="49" charset="0"/>
-              </a:rPr>
-              <a:t>Group </a:t>
-            </a:r>
-            <a:r>
-              <a:rPr lang="en-CA" sz="1300" b="1" dirty="0" err="1">
-                <a:latin typeface="Courier New" panose="02070309020205020404" pitchFamily="49" charset="0"/>
-                <a:cs typeface="Courier New" panose="02070309020205020404" pitchFamily="49" charset="0"/>
-              </a:rPr>
-              <a:t>toCE</a:t>
-            </a:r>
-            <a:r>
-              <a:rPr lang="en-CA" sz="1300" b="1" dirty="0">
-                <a:latin typeface="Courier New" panose="02070309020205020404" pitchFamily="49" charset="0"/>
-                <a:cs typeface="Courier New" panose="02070309020205020404" pitchFamily="49" charset="0"/>
-              </a:rPr>
-              <a:t>: Peer 10.41.1.2: being disabled because the interface is operationally disabled</a:t>
+              <a:rPr lang="en-CA" dirty="0"/>
+              <a:t>/network-instance/interfaces/interface:/router[</a:t>
+            </a:r>
+            <a:r>
+              <a:rPr lang="en-CA" b="1" dirty="0"/>
+              <a:t>router-name='Base'</a:t>
+            </a:r>
+            <a:r>
+              <a:rPr lang="en-CA" dirty="0"/>
+              <a:t>]/interface[interface-name='toVMX226_ExplicitNull'] | </a:t>
+            </a:r>
+            <a:r>
+              <a:rPr lang="en-CA" b="1" dirty="0"/>
+              <a:t>Interface toVMX226_ExplicitNull is not operational</a:t>
             </a:r>
           </a:p>
           <a:p>
@@ -9397,37 +9381,214 @@
               <a:buNone/>
             </a:pPr>
             <a:r>
-              <a:rPr lang="en-CA" sz="1300" b="1" dirty="0">
-                <a:latin typeface="Courier New" panose="02070309020205020404" pitchFamily="49" charset="0"/>
-                <a:cs typeface="Courier New" panose="02070309020205020404" pitchFamily="49" charset="0"/>
-              </a:rPr>
-              <a:t>🚨</a:t>
-            </a:r>
-            <a:r>
-              <a:rPr lang="en-CA" sz="1300" b="1" dirty="0" err="1">
-                <a:latin typeface="Courier New" panose="02070309020205020404" pitchFamily="49" charset="0"/>
-                <a:cs typeface="Courier New" panose="02070309020205020404" pitchFamily="49" charset="0"/>
-              </a:rPr>
-              <a:t>root_cause_fdns</a:t>
-            </a:r>
-            <a:r>
-              <a:rPr lang="en-CA" sz="1300" b="1" dirty="0">
-                <a:latin typeface="Courier New" panose="02070309020205020404" pitchFamily="49" charset="0"/>
-                <a:cs typeface="Courier New" panose="02070309020205020404" pitchFamily="49" charset="0"/>
-              </a:rPr>
-              <a:t>=["fdn:app:mdm-ami-cmodel:2001::225:equipment:Equipment:/port[port-id='1/1/c2/1']"]🚨</a:t>
-            </a:r>
+              <a:rPr lang="en-CA" dirty="0"/>
+              <a:t>2025-06-16T19:47:43.493167491Z | </a:t>
+            </a:r>
+            <a:r>
+              <a:rPr lang="en-CA" b="1" dirty="0"/>
+              <a:t>sim234_225</a:t>
+            </a:r>
+            <a:r>
+              <a:rPr lang="en-CA" dirty="0"/>
+              <a:t> | 2001::225 | fdn:app:mdm-ami-cmodel:2001::225:mpls:Mpls:/router[</a:t>
+            </a:r>
+            <a:r>
+              <a:rPr lang="en-CA" b="1" dirty="0"/>
+              <a:t>router-name='Base'</a:t>
+            </a:r>
+            <a:r>
+              <a:rPr lang="en-CA" dirty="0"/>
+              <a:t>]/</a:t>
+            </a:r>
+            <a:r>
+              <a:rPr lang="en-CA" b="1" dirty="0" err="1"/>
+              <a:t>mpls</a:t>
+            </a:r>
+            <a:r>
+              <a:rPr lang="en-CA" dirty="0"/>
+              <a:t> | </a:t>
+            </a:r>
+            <a:r>
+              <a:rPr lang="en-CA" b="1" dirty="0"/>
+              <a:t>Interface toVMX226 is in administrative state: </a:t>
+            </a:r>
+            <a:r>
+              <a:rPr lang="en-CA" b="1" dirty="0" err="1"/>
+              <a:t>inService</a:t>
+            </a:r>
+            <a:r>
+              <a:rPr lang="en-CA" b="1" dirty="0"/>
+              <a:t>, operational state: </a:t>
+            </a:r>
+            <a:r>
+              <a:rPr lang="en-CA" b="1" dirty="0" err="1"/>
+              <a:t>outOfService</a:t>
+            </a:r>
+            <a:endParaRPr lang="en-CA" b="1" dirty="0"/>
           </a:p>
           <a:p>
             <a:pPr marL="0" indent="0">
               <a:buNone/>
             </a:pPr>
             <a:r>
-              <a:rPr lang="en-CA" sz="1300" b="1" dirty="0">
-                <a:latin typeface="Courier New" panose="02070309020205020404" pitchFamily="49" charset="0"/>
-                <a:cs typeface="Courier New" panose="02070309020205020404" pitchFamily="49" charset="0"/>
-              </a:rPr>
-              <a:t>💡reasoning=The alarm 'Interface 1/1/c2/1 is not operational' is an equipment failure. The other alarms are likely caused by this failure. Therefore, the root cause is the interface failure.💡</a:t>
+              <a:rPr lang="en-CA" dirty="0"/>
+              <a:t>2025-06-16T19:47:43.500690340Z | </a:t>
+            </a:r>
+            <a:r>
+              <a:rPr lang="en-CA" b="1" dirty="0"/>
+              <a:t>sim234_225</a:t>
+            </a:r>
+            <a:r>
+              <a:rPr lang="en-CA" dirty="0"/>
+              <a:t> | 2001::225 | fdn:app:mdm-ami-cmodel:2001::225:/</a:t>
+            </a:r>
+            <a:r>
+              <a:rPr lang="en-CA" dirty="0" err="1"/>
+              <a:t>openconfig-network-instance:network-instances</a:t>
+            </a:r>
+            <a:r>
+              <a:rPr lang="en-CA" dirty="0"/>
+              <a:t>/network-instance/protocols/protocol/</a:t>
+            </a:r>
+            <a:r>
+              <a:rPr lang="en-CA" dirty="0" err="1"/>
+              <a:t>bgp</a:t>
+            </a:r>
+            <a:r>
+              <a:rPr lang="en-CA" dirty="0"/>
+              <a:t>/neighbors/neighbor/state:/service[</a:t>
+            </a:r>
+            <a:r>
+              <a:rPr lang="en-CA" b="1" dirty="0"/>
+              <a:t>service-id='411'</a:t>
+            </a:r>
+            <a:r>
+              <a:rPr lang="en-CA" dirty="0"/>
+              <a:t>]/</a:t>
+            </a:r>
+            <a:r>
+              <a:rPr lang="en-CA" dirty="0" err="1"/>
+              <a:t>bgp</a:t>
+            </a:r>
+            <a:r>
+              <a:rPr lang="en-CA" dirty="0"/>
+              <a:t>/neighbor[</a:t>
+            </a:r>
+            <a:r>
+              <a:rPr lang="en-CA" dirty="0" err="1"/>
+              <a:t>ip</a:t>
+            </a:r>
+            <a:r>
+              <a:rPr lang="en-CA" dirty="0"/>
+              <a:t>-address='10.41.1.2'] | </a:t>
+            </a:r>
+            <a:r>
+              <a:rPr lang="en-CA" b="1" dirty="0"/>
+              <a:t>(ASN 200) VR 7: Group </a:t>
+            </a:r>
+            <a:r>
+              <a:rPr lang="en-CA" b="1" dirty="0" err="1"/>
+              <a:t>toCE</a:t>
+            </a:r>
+            <a:r>
+              <a:rPr lang="en-CA" b="1" dirty="0"/>
+              <a:t>: Peer 10.41.1.2: being disabled because the interface is operationally disabled</a:t>
+            </a:r>
+          </a:p>
+          <a:p>
+            <a:pPr marL="0" indent="0">
+              <a:buNone/>
+            </a:pPr>
+            <a:r>
+              <a:rPr lang="en-CA" dirty="0"/>
+              <a:t>2025-06-16T19:47:46.433886263Z | </a:t>
+            </a:r>
+            <a:r>
+              <a:rPr lang="en-CA" b="1" dirty="0"/>
+              <a:t>sim234_236</a:t>
+            </a:r>
+            <a:r>
+              <a:rPr lang="en-CA" dirty="0"/>
+              <a:t> | 2001::236 | fdn:app:mdm-ami-cmodel:2001::236:/</a:t>
+            </a:r>
+            <a:r>
+              <a:rPr lang="en-CA" dirty="0" err="1"/>
+              <a:t>openconfig-network-instance:network-instances</a:t>
+            </a:r>
+            <a:r>
+              <a:rPr lang="en-CA" dirty="0"/>
+              <a:t>/network-instance/protocols/protocol/</a:t>
+            </a:r>
+            <a:r>
+              <a:rPr lang="en-CA" dirty="0" err="1"/>
+              <a:t>bgp</a:t>
+            </a:r>
+            <a:r>
+              <a:rPr lang="en-CA" dirty="0"/>
+              <a:t>/neighbors/neighbor/state:/router[</a:t>
+            </a:r>
+            <a:r>
+              <a:rPr lang="en-CA" b="1" dirty="0"/>
+              <a:t>router-name='Base'</a:t>
+            </a:r>
+            <a:r>
+              <a:rPr lang="en-CA" dirty="0"/>
+              <a:t>]/</a:t>
+            </a:r>
+            <a:r>
+              <a:rPr lang="en-CA" dirty="0" err="1"/>
+              <a:t>bgp</a:t>
+            </a:r>
+            <a:r>
+              <a:rPr lang="en-CA" dirty="0"/>
+              <a:t>/neighbor[</a:t>
+            </a:r>
+            <a:r>
+              <a:rPr lang="en-CA" dirty="0" err="1"/>
+              <a:t>ip</a:t>
+            </a:r>
+            <a:r>
+              <a:rPr lang="en-CA" dirty="0"/>
+              <a:t>-address='38.120.234.226'] | </a:t>
+            </a:r>
+            <a:r>
+              <a:rPr lang="en-CA" b="1" dirty="0"/>
+              <a:t>(ASN 200) VR 1: Group iBGP: Peer 38.120.234.226: received notification: code CEASE subcode CONN_REJECT</a:t>
+            </a:r>
+          </a:p>
+          <a:p>
+            <a:pPr marL="0" indent="0">
+              <a:buNone/>
+            </a:pPr>
+            <a:r>
+              <a:rPr lang="en-CA" dirty="0"/>
+              <a:t>🚨</a:t>
+            </a:r>
+            <a:r>
+              <a:rPr lang="en-CA" dirty="0" err="1"/>
+              <a:t>root_cause_fdns</a:t>
+            </a:r>
+            <a:r>
+              <a:rPr lang="en-CA" dirty="0"/>
+              <a:t>=["fdn:app:mdm-ami-cmodel:2001::225:equipment:Equipment:/port[port-id='1/1/c2/1']"]🚨</a:t>
+            </a:r>
+          </a:p>
+          <a:p>
+            <a:pPr marL="0" indent="0">
+              <a:buNone/>
+            </a:pPr>
+            <a:r>
+              <a:rPr lang="en-CA" dirty="0"/>
+              <a:t>💡reasoning=The port 'port-id='1/1/c2/1'' is not operational, resulting in dependent interface 'interface-name='toVMX226'' also being not operational. This then causes the L3VPN service 'service-id='411'' to fail and the BGP peer '10.41.1.2' associated with that service to be disabled. The MPLS service also fails. </a:t>
+            </a:r>
+          </a:p>
+          <a:p>
+            <a:pPr marL="0" indent="0">
+              <a:buNone/>
+            </a:pPr>
+            <a:r>
+              <a:rPr lang="en-CA" dirty="0"/>
+              <a:t>The failure of the BGP peer '38.120.234.226' on NE '2001::236' is unrelated, so is not the root cause.💡</a:t>
             </a:r>
           </a:p>
         </p:txBody>
@@ -9437,7 +9598,7 @@
           <p:cNvPr id="4" name="Rectangle 3">
             <a:extLst>
               <a:ext uri="{FF2B5EF4-FFF2-40B4-BE49-F238E27FC236}">
-                <a16:creationId xmlns:a16="http://schemas.microsoft.com/office/drawing/2014/main" id="{8DAD8370-247C-C815-0F3E-B33C337D198A}"/>
+                <a16:creationId xmlns:a16="http://schemas.microsoft.com/office/drawing/2014/main" id="{898CF3BC-3688-B505-FC7D-C42938E2F16F}"/>
               </a:ext>
             </a:extLst>
           </p:cNvPr>
@@ -9446,7 +9607,7 @@
         </p:nvSpPr>
         <p:spPr>
           <a:xfrm>
-            <a:off x="612647" y="4496586"/>
+            <a:off x="612647" y="4851756"/>
             <a:ext cx="10653579" cy="1036948"/>
           </a:xfrm>
           <a:prstGeom prst="rect">
@@ -9487,7 +9648,7 @@
     </p:spTree>
     <p:extLst>
       <p:ext uri="{BB962C8B-B14F-4D97-AF65-F5344CB8AC3E}">
-        <p14:creationId xmlns:p14="http://schemas.microsoft.com/office/powerpoint/2010/main" val="2843799496"/>
+        <p14:creationId xmlns:p14="http://schemas.microsoft.com/office/powerpoint/2010/main" val="3938305377"/>
       </p:ext>
     </p:extLst>
   </p:cSld>
@@ -9588,29 +9749,6 @@
               <a:buNone/>
             </a:pPr>
             <a:r>
-              <a:rPr lang="en-US" sz="1100" dirty="0" err="1">
-                <a:latin typeface="Courier New" panose="02070309020205020404" pitchFamily="49" charset="0"/>
-                <a:cs typeface="Courier New" panose="02070309020205020404" pitchFamily="49" charset="0"/>
-              </a:rPr>
-              <a:t>gemini_alarms_rca_agent</a:t>
-            </a:r>
-            <a:r>
-              <a:rPr lang="en-US" sz="1100" dirty="0">
-                <a:latin typeface="Courier New" panose="02070309020205020404" pitchFamily="49" charset="0"/>
-                <a:cs typeface="Courier New" panose="02070309020205020404" pitchFamily="49" charset="0"/>
-              </a:rPr>
-              <a:t> receiving messages ...</a:t>
-            </a:r>
-            <a:endParaRPr lang="en-CA" sz="1100" dirty="0">
-              <a:latin typeface="Courier New" panose="02070309020205020404" pitchFamily="49" charset="0"/>
-              <a:cs typeface="Courier New" panose="02070309020205020404" pitchFamily="49" charset="0"/>
-            </a:endParaRPr>
-          </a:p>
-          <a:p>
-            <a:pPr marL="0" indent="0">
-              <a:buNone/>
-            </a:pPr>
-            <a:r>
               <a:rPr lang="en-CA" sz="1300" dirty="0">
                 <a:latin typeface="Courier New" panose="02070309020205020404" pitchFamily="49" charset="0"/>
                 <a:cs typeface="Courier New" panose="02070309020205020404" pitchFamily="49" charset="0"/>
@@ -9876,7 +10014,7 @@
         </p:nvSpPr>
         <p:spPr>
           <a:xfrm>
-            <a:off x="612646" y="4646373"/>
+            <a:off x="612647" y="4382762"/>
             <a:ext cx="10653579" cy="1132258"/>
           </a:xfrm>
           <a:prstGeom prst="rect">

--- a/Presentation.pptx
+++ b/Presentation.pptx
@@ -212,7 +212,7 @@
           <a:p>
             <a:fld id="{F214320D-9E3A-43B2-B232-402D78146534}" type="datetimeFigureOut">
               <a:rPr lang="en-CA" smtClean="0"/>
-              <a:t>2025-06-25</a:t>
+              <a:t>2025-06-27</a:t>
             </a:fld>
             <a:endParaRPr lang="en-CA"/>
           </a:p>
@@ -1281,7 +1281,7 @@
           <a:p>
             <a:fld id="{C128FA71-3A18-48C0-980F-4B68F7F63042}" type="datetime1">
               <a:rPr lang="en-US" smtClean="0"/>
-              <a:t>6/25/2025</a:t>
+              <a:t>6/27/2025</a:t>
             </a:fld>
             <a:endParaRPr lang="en-US"/>
           </a:p>
@@ -1489,7 +1489,7 @@
           <a:p>
             <a:fld id="{7104EDB3-C0E8-45F8-9E1D-1B6C8D1880C0}" type="datetime1">
               <a:rPr lang="en-US" smtClean="0"/>
-              <a:t>6/25/2025</a:t>
+              <a:t>6/27/2025</a:t>
             </a:fld>
             <a:endParaRPr lang="en-US"/>
           </a:p>
@@ -1699,7 +1699,7 @@
           <a:p>
             <a:fld id="{9CF0EC4B-54ED-4041-B552-9BA760FA3DBA}" type="datetime1">
               <a:rPr lang="en-US" smtClean="0"/>
-              <a:t>6/25/2025</a:t>
+              <a:t>6/27/2025</a:t>
             </a:fld>
             <a:endParaRPr lang="en-US"/>
           </a:p>
@@ -1897,7 +1897,7 @@
           <a:p>
             <a:fld id="{51C1210E-201E-4473-82AC-2466F5386C38}" type="datetime1">
               <a:rPr lang="en-US" smtClean="0"/>
-              <a:t>6/25/2025</a:t>
+              <a:t>6/27/2025</a:t>
             </a:fld>
             <a:endParaRPr lang="en-US"/>
           </a:p>
@@ -2175,7 +2175,7 @@
           <a:p>
             <a:fld id="{B01EA198-6CAB-4B8F-B93F-1F9C8C4B6CE7}" type="datetime1">
               <a:rPr lang="en-US" smtClean="0"/>
-              <a:t>6/25/2025</a:t>
+              <a:t>6/27/2025</a:t>
             </a:fld>
             <a:endParaRPr lang="en-US"/>
           </a:p>
@@ -2447,7 +2447,7 @@
           <a:p>
             <a:fld id="{CA06041F-4525-44D5-AA4F-332294BF1F56}" type="datetime1">
               <a:rPr lang="en-US" smtClean="0"/>
-              <a:t>6/25/2025</a:t>
+              <a:t>6/27/2025</a:t>
             </a:fld>
             <a:endParaRPr lang="en-US"/>
           </a:p>
@@ -2871,7 +2871,7 @@
           <a:p>
             <a:fld id="{F9557091-BBDF-4EB9-BA6B-2BB67AC4FC0F}" type="datetime1">
               <a:rPr lang="en-US" smtClean="0"/>
-              <a:t>6/25/2025</a:t>
+              <a:t>6/27/2025</a:t>
             </a:fld>
             <a:endParaRPr lang="en-US"/>
           </a:p>
@@ -3012,7 +3012,7 @@
           <a:p>
             <a:fld id="{2D6B226B-77A6-410C-9796-083F278E0125}" type="datetime1">
               <a:rPr lang="en-US" smtClean="0"/>
-              <a:t>6/25/2025</a:t>
+              <a:t>6/27/2025</a:t>
             </a:fld>
             <a:endParaRPr lang="en-US"/>
           </a:p>
@@ -3125,7 +3125,7 @@
           <a:p>
             <a:fld id="{A23A578B-D289-4C40-8593-3D356C49DA58}" type="datetime1">
               <a:rPr lang="en-US" smtClean="0"/>
-              <a:t>6/25/2025</a:t>
+              <a:t>6/27/2025</a:t>
             </a:fld>
             <a:endParaRPr lang="en-US"/>
           </a:p>
@@ -3444,7 +3444,7 @@
           <a:p>
             <a:fld id="{713DFAE3-14DB-48A7-A80F-80DDB072CE3D}" type="datetime1">
               <a:rPr lang="en-US" smtClean="0"/>
-              <a:t>6/25/2025</a:t>
+              <a:t>6/27/2025</a:t>
             </a:fld>
             <a:endParaRPr lang="en-US"/>
           </a:p>
@@ -3738,7 +3738,7 @@
           <a:p>
             <a:fld id="{92C5EAEF-6478-4102-8F5D-A5FE9FC97ACB}" type="datetime1">
               <a:rPr lang="en-US" smtClean="0"/>
-              <a:t>6/25/2025</a:t>
+              <a:t>6/27/2025</a:t>
             </a:fld>
             <a:endParaRPr lang="en-US"/>
           </a:p>
@@ -3979,7 +3979,7 @@
           <a:p>
             <a:fld id="{67F45AC6-C491-4585-A584-9CE2AF7D5500}" type="datetime1">
               <a:rPr lang="en-US" smtClean="0"/>
-              <a:t>6/25/2025</a:t>
+              <a:t>6/27/2025</a:t>
             </a:fld>
             <a:endParaRPr lang="en-US"/>
           </a:p>
@@ -4663,7 +4663,7 @@
             </a:r>
             <a:r>
               <a:rPr lang="en-US" sz="1800" b="0" dirty="0"/>
-              <a:t>v7</a:t>
+              <a:t>v8</a:t>
             </a:r>
             <a:br>
               <a:rPr lang="en-US" sz="5200" dirty="0"/>
@@ -4729,6 +4729,16 @@
           <a:p>
             <a:pPr algn="l"/>
             <a:r>
+              <a:rPr lang="en-US" sz="1400">
+                <a:solidFill>
+                  <a:schemeClr val="tx1">
+                    <a:lumMod val="85000"/>
+                  </a:schemeClr>
+                </a:solidFill>
+              </a:rPr>
+              <a:t>July </a:t>
+            </a:r>
+            <a:r>
               <a:rPr lang="en-US" sz="1400" dirty="0">
                 <a:solidFill>
                   <a:schemeClr val="tx1">
@@ -4736,7 +4746,7 @@
                   </a:schemeClr>
                 </a:solidFill>
               </a:rPr>
-              <a:t>June 2025</a:t>
+              <a:t>2025</a:t>
             </a:r>
             <a:endParaRPr lang="en-CA" sz="1400" dirty="0">
               <a:solidFill>
@@ -6005,74 +6015,124 @@
               <a:rPr lang="en-US" dirty="0">
                 <a:cs typeface="Courier New" panose="02070309020205020404" pitchFamily="49" charset="0"/>
               </a:rPr>
-              <a:t>v5 </a:t>
-            </a:r>
-            <a:r>
-              <a:rPr lang="en-US">
-                <a:cs typeface="Courier New" panose="02070309020205020404" pitchFamily="49" charset="0"/>
-              </a:rPr>
-              <a:t>-&gt; </a:t>
-            </a:r>
-            <a:r>
-              <a:rPr lang="en-US" b="1">
+              <a:t>v5 -&gt; </a:t>
+            </a:r>
+            <a:r>
+              <a:rPr lang="en-US" b="1" dirty="0">
                 <a:cs typeface="Courier New" panose="02070309020205020404" pitchFamily="49" charset="0"/>
               </a:rPr>
               <a:t>v6 -&gt; v7</a:t>
             </a:r>
-            <a:endParaRPr lang="en-US" b="1" dirty="0">
+          </a:p>
+          <a:p>
+            <a:pPr lvl="1"/>
+            <a:r>
+              <a:rPr lang="en-US" b="1" dirty="0">
+                <a:cs typeface="Courier New" panose="02070309020205020404" pitchFamily="49" charset="0"/>
+              </a:rPr>
+              <a:t>Added </a:t>
+            </a:r>
+            <a:r>
+              <a:rPr lang="en-US" dirty="0" err="1">
+                <a:cs typeface="Courier New" panose="02070309020205020404" pitchFamily="49" charset="0"/>
+              </a:rPr>
+              <a:t>LangGraph</a:t>
+            </a:r>
+            <a:r>
+              <a:rPr lang="en-US" dirty="0">
+                <a:cs typeface="Courier New" panose="02070309020205020404" pitchFamily="49" charset="0"/>
+              </a:rPr>
+              <a:t> to support multi-turn </a:t>
+            </a:r>
+            <a:r>
+              <a:rPr lang="en-US" dirty="0" err="1">
+                <a:cs typeface="Courier New" panose="02070309020205020404" pitchFamily="49" charset="0"/>
+              </a:rPr>
+              <a:t>ReAct</a:t>
+            </a:r>
+            <a:r>
+              <a:rPr lang="en-US" dirty="0">
+                <a:cs typeface="Courier New" panose="02070309020205020404" pitchFamily="49" charset="0"/>
+              </a:rPr>
+              <a:t> loops (ongoing)</a:t>
+            </a:r>
+          </a:p>
+          <a:p>
+            <a:pPr lvl="2"/>
+            <a:r>
+              <a:rPr lang="en-US" dirty="0">
+                <a:cs typeface="Courier New" panose="02070309020205020404" pitchFamily="49" charset="0"/>
+              </a:rPr>
+              <a:t>TODO: Support parallel NE </a:t>
+            </a:r>
+            <a:r>
+              <a:rPr lang="en-US" dirty="0" err="1">
+                <a:cs typeface="Courier New" panose="02070309020205020404" pitchFamily="49" charset="0"/>
+              </a:rPr>
+              <a:t>LangChains</a:t>
+            </a:r>
+            <a:endParaRPr lang="en-US" dirty="0">
               <a:cs typeface="Courier New" panose="02070309020205020404" pitchFamily="49" charset="0"/>
             </a:endParaRPr>
           </a:p>
           <a:p>
+            <a:r>
+              <a:rPr lang="en-US" dirty="0">
+                <a:cs typeface="Courier New" panose="02070309020205020404" pitchFamily="49" charset="0"/>
+              </a:rPr>
+              <a:t>v7 </a:t>
+            </a:r>
+            <a:r>
+              <a:rPr lang="en-US" b="1" dirty="0">
+                <a:cs typeface="Courier New" panose="02070309020205020404" pitchFamily="49" charset="0"/>
+              </a:rPr>
+              <a:t>-&gt; v8</a:t>
+            </a:r>
+          </a:p>
+          <a:p>
             <a:pPr lvl="1"/>
             <a:r>
               <a:rPr lang="en-US" b="1" dirty="0">
                 <a:cs typeface="Courier New" panose="02070309020205020404" pitchFamily="49" charset="0"/>
               </a:rPr>
-              <a:t>Added </a:t>
-            </a:r>
+              <a:t>Migrated</a:t>
+            </a:r>
+            <a:r>
+              <a:rPr lang="en-US" dirty="0">
+                <a:cs typeface="Courier New" panose="02070309020205020404" pitchFamily="49" charset="0"/>
+              </a:rPr>
+              <a:t> to Gemini 2.5</a:t>
+            </a:r>
+          </a:p>
+          <a:p>
+            <a:pPr lvl="1"/>
+            <a:r>
+              <a:rPr lang="en-US" b="1" dirty="0">
+                <a:cs typeface="Courier New" panose="02070309020205020404" pitchFamily="49" charset="0"/>
+              </a:rPr>
+              <a:t>Adding </a:t>
+            </a:r>
+            <a:r>
+              <a:rPr lang="en-US" dirty="0">
+                <a:cs typeface="Courier New" panose="02070309020205020404" pitchFamily="49" charset="0"/>
+              </a:rPr>
+              <a:t>Redis </a:t>
+            </a:r>
+          </a:p>
+          <a:p>
+            <a:pPr lvl="2"/>
             <a:r>
               <a:rPr lang="en-US" dirty="0" err="1">
                 <a:cs typeface="Courier New" panose="02070309020205020404" pitchFamily="49" charset="0"/>
               </a:rPr>
-              <a:t>LangGraph</a:t>
+              <a:t>LangChain</a:t>
             </a:r>
             <a:r>
               <a:rPr lang="en-US" dirty="0">
                 <a:cs typeface="Courier New" panose="02070309020205020404" pitchFamily="49" charset="0"/>
               </a:rPr>
-              <a:t> to support multi-turn </a:t>
-            </a:r>
-            <a:r>
-              <a:rPr lang="en-US" dirty="0" err="1">
-                <a:cs typeface="Courier New" panose="02070309020205020404" pitchFamily="49" charset="0"/>
-              </a:rPr>
-              <a:t>ReAct</a:t>
-            </a:r>
-            <a:r>
-              <a:rPr lang="en-US" dirty="0">
-                <a:cs typeface="Courier New" panose="02070309020205020404" pitchFamily="49" charset="0"/>
-              </a:rPr>
-              <a:t> loops (ongoing)</a:t>
-            </a:r>
-          </a:p>
-          <a:p>
-            <a:pPr lvl="2"/>
-            <a:r>
-              <a:rPr lang="en-US" b="1" dirty="0">
-                <a:cs typeface="Courier New" panose="02070309020205020404" pitchFamily="49" charset="0"/>
-              </a:rPr>
-              <a:t>TODO: </a:t>
-            </a:r>
-            <a:r>
-              <a:rPr lang="en-US" dirty="0">
-                <a:cs typeface="Courier New" panose="02070309020205020404" pitchFamily="49" charset="0"/>
-              </a:rPr>
-              <a:t>Handle parallel NE chains</a:t>
-            </a:r>
-            <a:endParaRPr lang="en-US" b="1" dirty="0">
-              <a:cs typeface="Courier New" panose="02070309020205020404" pitchFamily="49" charset="0"/>
-            </a:endParaRPr>
+              <a:t> performance improvements</a:t>
+            </a:r>
           </a:p>
           <a:p>
             <a:endParaRPr lang="en-US" dirty="0">

--- a/Presentation.pptx
+++ b/Presentation.pptx
@@ -6632,7 +6632,14 @@
             <a:pPr lvl="3"/>
             <a:r>
               <a:rPr lang="en-US" i="1" dirty="0"/>
-              <a:t>Solution: Concatenate</a:t>
+              <a:t>Solutions: </a:t>
+            </a:r>
+          </a:p>
+          <a:p>
+            <a:pPr lvl="4"/>
+            <a:r>
+              <a:rPr lang="en-US" i="1" dirty="0"/>
+              <a:t>Concatenate</a:t>
             </a:r>
             <a:r>
               <a:rPr lang="en-US" dirty="0"/>
@@ -6652,9 +6659,34 @@
               <a:rPr lang="en-US" sz="1000" b="1" dirty="0"/>
               <a:t>Additional enhancement: Adjustable window size</a:t>
             </a:r>
-            <a:endParaRPr lang="en-CA" dirty="0">
-              <a:cs typeface="Courier New" panose="02070309020205020404" pitchFamily="49" charset="0"/>
-            </a:endParaRPr>
+          </a:p>
+          <a:p>
+            <a:pPr marL="0" lvl="4" indent="0">
+              <a:buNone/>
+            </a:pPr>
+            <a:r>
+              <a:rPr lang="en-US" sz="400" b="1" dirty="0"/>
+              <a:t>	</a:t>
+            </a:r>
+            <a:r>
+              <a:rPr lang="en-US" b="1" dirty="0"/>
+              <a:t>OR</a:t>
+            </a:r>
+          </a:p>
+          <a:p>
+            <a:pPr lvl="4"/>
+            <a:r>
+              <a:rPr lang="en-US" dirty="0"/>
+              <a:t>Utilize </a:t>
+            </a:r>
+            <a:r>
+              <a:rPr lang="en-US" i="1" dirty="0"/>
+              <a:t>recall/memory </a:t>
+            </a:r>
+            <a:r>
+              <a:rPr lang="en-US" dirty="0"/>
+              <a:t>that Gemini and other advanced LLMs possess </a:t>
+            </a:r>
           </a:p>
         </p:txBody>
       </p:sp>

--- a/Presentation.pptx
+++ b/Presentation.pptx
@@ -213,7 +213,7 @@
           <a:p>
             <a:fld id="{F214320D-9E3A-43B2-B232-402D78146534}" type="datetimeFigureOut">
               <a:rPr lang="en-CA" smtClean="0"/>
-              <a:t>2025-07-03</a:t>
+              <a:t>2025-07-07</a:t>
             </a:fld>
             <a:endParaRPr lang="en-CA"/>
           </a:p>
@@ -1390,7 +1390,7 @@
           <a:p>
             <a:fld id="{C128FA71-3A18-48C0-980F-4B68F7F63042}" type="datetime1">
               <a:rPr lang="en-US" smtClean="0"/>
-              <a:t>7/3/2025</a:t>
+              <a:t>7/7/2025</a:t>
             </a:fld>
             <a:endParaRPr lang="en-US"/>
           </a:p>
@@ -1598,7 +1598,7 @@
           <a:p>
             <a:fld id="{7104EDB3-C0E8-45F8-9E1D-1B6C8D1880C0}" type="datetime1">
               <a:rPr lang="en-US" smtClean="0"/>
-              <a:t>7/3/2025</a:t>
+              <a:t>7/7/2025</a:t>
             </a:fld>
             <a:endParaRPr lang="en-US"/>
           </a:p>
@@ -1808,7 +1808,7 @@
           <a:p>
             <a:fld id="{9CF0EC4B-54ED-4041-B552-9BA760FA3DBA}" type="datetime1">
               <a:rPr lang="en-US" smtClean="0"/>
-              <a:t>7/3/2025</a:t>
+              <a:t>7/7/2025</a:t>
             </a:fld>
             <a:endParaRPr lang="en-US"/>
           </a:p>
@@ -2006,7 +2006,7 @@
           <a:p>
             <a:fld id="{51C1210E-201E-4473-82AC-2466F5386C38}" type="datetime1">
               <a:rPr lang="en-US" smtClean="0"/>
-              <a:t>7/3/2025</a:t>
+              <a:t>7/7/2025</a:t>
             </a:fld>
             <a:endParaRPr lang="en-US"/>
           </a:p>
@@ -2284,7 +2284,7 @@
           <a:p>
             <a:fld id="{B01EA198-6CAB-4B8F-B93F-1F9C8C4B6CE7}" type="datetime1">
               <a:rPr lang="en-US" smtClean="0"/>
-              <a:t>7/3/2025</a:t>
+              <a:t>7/7/2025</a:t>
             </a:fld>
             <a:endParaRPr lang="en-US"/>
           </a:p>
@@ -2556,7 +2556,7 @@
           <a:p>
             <a:fld id="{CA06041F-4525-44D5-AA4F-332294BF1F56}" type="datetime1">
               <a:rPr lang="en-US" smtClean="0"/>
-              <a:t>7/3/2025</a:t>
+              <a:t>7/7/2025</a:t>
             </a:fld>
             <a:endParaRPr lang="en-US"/>
           </a:p>
@@ -2980,7 +2980,7 @@
           <a:p>
             <a:fld id="{F9557091-BBDF-4EB9-BA6B-2BB67AC4FC0F}" type="datetime1">
               <a:rPr lang="en-US" smtClean="0"/>
-              <a:t>7/3/2025</a:t>
+              <a:t>7/7/2025</a:t>
             </a:fld>
             <a:endParaRPr lang="en-US"/>
           </a:p>
@@ -3121,7 +3121,7 @@
           <a:p>
             <a:fld id="{2D6B226B-77A6-410C-9796-083F278E0125}" type="datetime1">
               <a:rPr lang="en-US" smtClean="0"/>
-              <a:t>7/3/2025</a:t>
+              <a:t>7/7/2025</a:t>
             </a:fld>
             <a:endParaRPr lang="en-US"/>
           </a:p>
@@ -3234,7 +3234,7 @@
           <a:p>
             <a:fld id="{A23A578B-D289-4C40-8593-3D356C49DA58}" type="datetime1">
               <a:rPr lang="en-US" smtClean="0"/>
-              <a:t>7/3/2025</a:t>
+              <a:t>7/7/2025</a:t>
             </a:fld>
             <a:endParaRPr lang="en-US"/>
           </a:p>
@@ -3553,7 +3553,7 @@
           <a:p>
             <a:fld id="{713DFAE3-14DB-48A7-A80F-80DDB072CE3D}" type="datetime1">
               <a:rPr lang="en-US" smtClean="0"/>
-              <a:t>7/3/2025</a:t>
+              <a:t>7/7/2025</a:t>
             </a:fld>
             <a:endParaRPr lang="en-US"/>
           </a:p>
@@ -3847,7 +3847,7 @@
           <a:p>
             <a:fld id="{92C5EAEF-6478-4102-8F5D-A5FE9FC97ACB}" type="datetime1">
               <a:rPr lang="en-US" smtClean="0"/>
-              <a:t>7/3/2025</a:t>
+              <a:t>7/7/2025</a:t>
             </a:fld>
             <a:endParaRPr lang="en-US"/>
           </a:p>
@@ -4088,7 +4088,7 @@
           <a:p>
             <a:fld id="{67F45AC6-C491-4585-A584-9CE2AF7D5500}" type="datetime1">
               <a:rPr lang="en-US" smtClean="0"/>
-              <a:t>7/3/2025</a:t>
+              <a:t>7/7/2025</a:t>
             </a:fld>
             <a:endParaRPr lang="en-US"/>
           </a:p>
@@ -6260,22 +6260,28 @@
               <a:rPr lang="en-US" b="1" dirty="0">
                 <a:cs typeface="Courier New" panose="02070309020205020404" pitchFamily="49" charset="0"/>
               </a:rPr>
-              <a:t>v8 (paused)</a:t>
+              <a:t>v8</a:t>
             </a:r>
           </a:p>
           <a:p>
             <a:pPr lvl="1"/>
             <a:r>
+              <a:rPr lang="en-US" b="1" dirty="0">
+                <a:cs typeface="Courier New" panose="02070309020205020404" pitchFamily="49" charset="0"/>
+              </a:rPr>
+              <a:t>Added</a:t>
+            </a:r>
+            <a:r>
               <a:rPr lang="en-US" dirty="0">
                 <a:cs typeface="Courier New" panose="02070309020205020404" pitchFamily="49" charset="0"/>
               </a:rPr>
-              <a:t>Add Redis</a:t>
+              <a:t> Redis</a:t>
             </a:r>
           </a:p>
           <a:p>
             <a:pPr lvl="2"/>
             <a:r>
-              <a:rPr lang="en-US">
+              <a:rPr lang="en-US" dirty="0">
                 <a:cs typeface="Courier New" panose="02070309020205020404" pitchFamily="49" charset="0"/>
               </a:rPr>
               <a:t>To improve </a:t>
@@ -6306,42 +6312,6 @@
           </a:p>
         </p:txBody>
       </p:sp>
-      <p:pic>
-        <p:nvPicPr>
-          <p:cNvPr id="5" name="Picture 4" descr="A red triangle on a black background&#10;&#10;AI-generated content may be incorrect.">
-            <a:extLst>
-              <a:ext uri="{FF2B5EF4-FFF2-40B4-BE49-F238E27FC236}">
-                <a16:creationId xmlns:a16="http://schemas.microsoft.com/office/drawing/2014/main" id="{1D865A46-3BC3-194E-ED41-0C4012E6EF9D}"/>
-              </a:ext>
-            </a:extLst>
-          </p:cNvPr>
-          <p:cNvPicPr>
-            <a:picLocks noChangeAspect="1"/>
-          </p:cNvPicPr>
-          <p:nvPr/>
-        </p:nvPicPr>
-        <p:blipFill>
-          <a:blip r:embed="rId4">
-            <a:extLst>
-              <a:ext uri="{28A0092B-C50C-407E-A947-70E740481C1C}">
-                <a14:useLocalDpi xmlns:a14="http://schemas.microsoft.com/office/drawing/2010/main" val="0"/>
-              </a:ext>
-            </a:extLst>
-          </a:blip>
-          <a:stretch>
-            <a:fillRect/>
-          </a:stretch>
-        </p:blipFill>
-        <p:spPr>
-          <a:xfrm>
-            <a:off x="3129254" y="4986638"/>
-            <a:ext cx="421518" cy="421518"/>
-          </a:xfrm>
-          <a:prstGeom prst="rect">
-            <a:avLst/>
-          </a:prstGeom>
-        </p:spPr>
-      </p:pic>
     </p:spTree>
     <p:extLst>
       <p:ext uri="{BB962C8B-B14F-4D97-AF65-F5344CB8AC3E}">
@@ -6452,10 +6422,16 @@
           <a:p>
             <a:pPr lvl="1"/>
             <a:r>
+              <a:rPr lang="en-US" b="1" dirty="0">
+                <a:cs typeface="Courier New" panose="02070309020205020404" pitchFamily="49" charset="0"/>
+              </a:rPr>
+              <a:t>Refactor</a:t>
+            </a:r>
+            <a:r>
               <a:rPr lang="en-US" dirty="0">
                 <a:cs typeface="Courier New" panose="02070309020205020404" pitchFamily="49" charset="0"/>
               </a:rPr>
-              <a:t>Refactor to solve Windows </a:t>
+              <a:t> to solve Windows </a:t>
             </a:r>
             <a:r>
               <a:rPr lang="en-US" i="1" dirty="0">
@@ -6468,6 +6444,21 @@
                 <a:cs typeface="Courier New" panose="02070309020205020404" pitchFamily="49" charset="0"/>
               </a:rPr>
               <a:t> issues</a:t>
+            </a:r>
+          </a:p>
+          <a:p>
+            <a:pPr lvl="1"/>
+            <a:r>
+              <a:rPr lang="en-US" b="1" dirty="0">
+                <a:cs typeface="Courier New" panose="02070309020205020404" pitchFamily="49" charset="0"/>
+              </a:rPr>
+              <a:t>Added</a:t>
+            </a:r>
+            <a:r>
+              <a:rPr lang="en-US" dirty="0">
+                <a:cs typeface="Courier New" panose="02070309020205020404" pitchFamily="49" charset="0"/>
+              </a:rPr>
+              <a:t> Redis message-bus</a:t>
             </a:r>
           </a:p>
           <a:p>
@@ -6478,42 +6469,6 @@
           </a:p>
         </p:txBody>
       </p:sp>
-      <p:pic>
-        <p:nvPicPr>
-          <p:cNvPr id="4" name="Picture 3" descr="A red triangle on a black background&#10;&#10;AI-generated content may be incorrect.">
-            <a:extLst>
-              <a:ext uri="{FF2B5EF4-FFF2-40B4-BE49-F238E27FC236}">
-                <a16:creationId xmlns:a16="http://schemas.microsoft.com/office/drawing/2014/main" id="{D215C76C-F82F-BCA9-08BB-344489E59E2C}"/>
-              </a:ext>
-            </a:extLst>
-          </p:cNvPr>
-          <p:cNvPicPr>
-            <a:picLocks noChangeAspect="1"/>
-          </p:cNvPicPr>
-          <p:nvPr/>
-        </p:nvPicPr>
-        <p:blipFill>
-          <a:blip r:embed="rId3">
-            <a:extLst>
-              <a:ext uri="{28A0092B-C50C-407E-A947-70E740481C1C}">
-                <a14:useLocalDpi xmlns:a14="http://schemas.microsoft.com/office/drawing/2010/main" val="0"/>
-              </a:ext>
-            </a:extLst>
-          </a:blip>
-          <a:stretch>
-            <a:fillRect/>
-          </a:stretch>
-        </p:blipFill>
-        <p:spPr>
-          <a:xfrm>
-            <a:off x="5540086" y="2119186"/>
-            <a:ext cx="421518" cy="421518"/>
-          </a:xfrm>
-          <a:prstGeom prst="rect">
-            <a:avLst/>
-          </a:prstGeom>
-        </p:spPr>
-      </p:pic>
     </p:spTree>
     <p:extLst>
       <p:ext uri="{BB962C8B-B14F-4D97-AF65-F5344CB8AC3E}">

--- a/Presentation.pptx
+++ b/Presentation.pptx
@@ -4772,7 +4772,7 @@
             </a:r>
             <a:r>
               <a:rPr lang="en-US" sz="1800" b="0" dirty="0"/>
-              <a:t>v8</a:t>
+              <a:t>v8+</a:t>
             </a:r>
             <a:br>
               <a:rPr lang="en-US" sz="5200" dirty="0"/>
@@ -4838,6 +4838,16 @@
           <a:p>
             <a:pPr algn="l"/>
             <a:r>
+              <a:rPr lang="en-US" sz="1400">
+                <a:solidFill>
+                  <a:schemeClr val="tx1">
+                    <a:lumMod val="85000"/>
+                  </a:schemeClr>
+                </a:solidFill>
+              </a:rPr>
+              <a:t>July </a:t>
+            </a:r>
+            <a:r>
               <a:rPr lang="en-US" sz="1400" dirty="0">
                 <a:solidFill>
                   <a:schemeClr val="tx1">
@@ -4845,7 +4855,7 @@
                   </a:schemeClr>
                 </a:solidFill>
               </a:rPr>
-              <a:t>June 2025</a:t>
+              <a:t>2025</a:t>
             </a:r>
             <a:endParaRPr lang="en-CA" sz="1400" dirty="0">
               <a:solidFill>
@@ -6189,93 +6199,87 @@
               <a:rPr lang="en-US" dirty="0">
                 <a:cs typeface="Courier New" panose="02070309020205020404" pitchFamily="49" charset="0"/>
               </a:rPr>
-              <a:t> loops (ongoing)</a:t>
+              <a:t> loops</a:t>
+            </a:r>
+          </a:p>
+          <a:p>
+            <a:pPr lvl="1"/>
+            <a:r>
+              <a:rPr lang="en-US" b="1" dirty="0">
+                <a:cs typeface="Courier New" panose="02070309020205020404" pitchFamily="49" charset="0"/>
+              </a:rPr>
+              <a:t>Added</a:t>
+            </a:r>
+            <a:r>
+              <a:rPr lang="en-US" dirty="0">
+                <a:cs typeface="Courier New" panose="02070309020205020404" pitchFamily="49" charset="0"/>
+              </a:rPr>
+              <a:t> multi-model</a:t>
             </a:r>
           </a:p>
           <a:p>
             <a:pPr lvl="2"/>
             <a:r>
+              <a:rPr lang="en-US" dirty="0">
+                <a:cs typeface="Courier New" panose="02070309020205020404" pitchFamily="49" charset="0"/>
+              </a:rPr>
+              <a:t>Two Agents</a:t>
+            </a:r>
+          </a:p>
+          <a:p>
+            <a:pPr lvl="3"/>
+            <a:r>
+              <a:rPr lang="en-US" dirty="0">
+                <a:cs typeface="Courier New" panose="02070309020205020404" pitchFamily="49" charset="0"/>
+              </a:rPr>
+              <a:t>One Agent uses tools to research the alarms</a:t>
+            </a:r>
+          </a:p>
+          <a:p>
+            <a:pPr lvl="3"/>
+            <a:r>
+              <a:rPr lang="en-US" dirty="0">
+                <a:cs typeface="Courier New" panose="02070309020205020404" pitchFamily="49" charset="0"/>
+              </a:rPr>
+              <a:t>Another Agent to do the RCA</a:t>
+            </a:r>
+          </a:p>
+          <a:p>
+            <a:r>
+              <a:rPr lang="en-US" dirty="0">
+                <a:cs typeface="Courier New" panose="02070309020205020404" pitchFamily="49" charset="0"/>
+              </a:rPr>
+              <a:t>v7 -&gt; </a:t>
+            </a:r>
+            <a:r>
               <a:rPr lang="en-US" b="1" dirty="0">
                 <a:cs typeface="Courier New" panose="02070309020205020404" pitchFamily="49" charset="0"/>
               </a:rPr>
-              <a:t>TODO: </a:t>
+              <a:t>v8</a:t>
+            </a:r>
+          </a:p>
+          <a:p>
+            <a:pPr lvl="1"/>
+            <a:r>
+              <a:rPr lang="en-US" b="1" dirty="0">
+                <a:cs typeface="Courier New" panose="02070309020205020404" pitchFamily="49" charset="0"/>
+              </a:rPr>
+              <a:t>Added</a:t>
             </a:r>
             <a:r>
               <a:rPr lang="en-US" dirty="0">
                 <a:cs typeface="Courier New" panose="02070309020205020404" pitchFamily="49" charset="0"/>
               </a:rPr>
-              <a:t>Handle parallel NE chains</a:t>
-            </a:r>
-          </a:p>
-          <a:p>
-            <a:pPr lvl="1"/>
-            <a:r>
-              <a:rPr lang="en-US" b="1" dirty="0">
-                <a:cs typeface="Courier New" panose="02070309020205020404" pitchFamily="49" charset="0"/>
-              </a:rPr>
-              <a:t>Added</a:t>
-            </a:r>
+              <a:t> Redis </a:t>
+            </a:r>
+          </a:p>
+          <a:p>
+            <a:pPr lvl="2"/>
             <a:r>
               <a:rPr lang="en-US" dirty="0">
                 <a:cs typeface="Courier New" panose="02070309020205020404" pitchFamily="49" charset="0"/>
               </a:rPr>
-              <a:t> multi-model</a:t>
-            </a:r>
-          </a:p>
-          <a:p>
-            <a:pPr lvl="2"/>
-            <a:r>
-              <a:rPr lang="en-US" dirty="0">
-                <a:cs typeface="Courier New" panose="02070309020205020404" pitchFamily="49" charset="0"/>
-              </a:rPr>
-              <a:t>Two Agents</a:t>
-            </a:r>
-          </a:p>
-          <a:p>
-            <a:pPr lvl="3"/>
-            <a:r>
-              <a:rPr lang="en-US" dirty="0">
-                <a:cs typeface="Courier New" panose="02070309020205020404" pitchFamily="49" charset="0"/>
-              </a:rPr>
-              <a:t>One Agent uses tools to research the alarms</a:t>
-            </a:r>
-          </a:p>
-          <a:p>
-            <a:pPr lvl="3"/>
-            <a:r>
-              <a:rPr lang="en-US" dirty="0">
-                <a:cs typeface="Courier New" panose="02070309020205020404" pitchFamily="49" charset="0"/>
-              </a:rPr>
-              <a:t>Another Agent performs the RCA</a:t>
-            </a:r>
-          </a:p>
-          <a:p>
-            <a:r>
-              <a:rPr lang="en-US" dirty="0">
-                <a:cs typeface="Courier New" panose="02070309020205020404" pitchFamily="49" charset="0"/>
-              </a:rPr>
-              <a:t>v7 -&gt; </a:t>
-            </a:r>
-            <a:r>
-              <a:rPr lang="en-US" b="1" dirty="0">
-                <a:cs typeface="Courier New" panose="02070309020205020404" pitchFamily="49" charset="0"/>
-              </a:rPr>
-              <a:t>v8</a:t>
-            </a:r>
-          </a:p>
-          <a:p>
-            <a:pPr lvl="1"/>
-            <a:r>
-              <a:rPr lang="en-US" b="1" dirty="0">
-                <a:cs typeface="Courier New" panose="02070309020205020404" pitchFamily="49" charset="0"/>
-              </a:rPr>
-              <a:t>Added</a:t>
-            </a:r>
-            <a:r>
-              <a:rPr lang="en-US" dirty="0">
-                <a:cs typeface="Courier New" panose="02070309020205020404" pitchFamily="49" charset="0"/>
-              </a:rPr>
-              <a:t> Redis</a:t>
+              <a:t>Store tools outputs</a:t>
             </a:r>
           </a:p>
           <a:p>
@@ -6462,6 +6466,42 @@
             </a:r>
           </a:p>
           <a:p>
+            <a:r>
+              <a:rPr lang="en-US" dirty="0">
+                <a:cs typeface="Courier New" panose="02070309020205020404" pitchFamily="49" charset="0"/>
+              </a:rPr>
+              <a:t>Memory</a:t>
+            </a:r>
+          </a:p>
+          <a:p>
+            <a:pPr lvl="1"/>
+            <a:r>
+              <a:rPr lang="en-US" b="1" dirty="0"/>
+              <a:t>Utilize</a:t>
+            </a:r>
+            <a:r>
+              <a:rPr lang="en-US" dirty="0"/>
+              <a:t> </a:t>
+            </a:r>
+            <a:r>
+              <a:rPr lang="en-US" i="1" dirty="0"/>
+              <a:t>recall/memory </a:t>
+            </a:r>
+            <a:r>
+              <a:rPr lang="en-US" dirty="0"/>
+              <a:t>that Gemini and other advanced LLMs possess</a:t>
+            </a:r>
+            <a:endParaRPr lang="en-US" dirty="0">
+              <a:cs typeface="Courier New" panose="02070309020205020404" pitchFamily="49" charset="0"/>
+            </a:endParaRPr>
+          </a:p>
+          <a:p>
+            <a:pPr lvl="1"/>
+            <a:endParaRPr lang="en-US" dirty="0">
+              <a:cs typeface="Courier New" panose="02070309020205020404" pitchFamily="49" charset="0"/>
+            </a:endParaRPr>
+          </a:p>
+          <a:p>
             <a:pPr lvl="2"/>
             <a:endParaRPr lang="en-US" dirty="0">
               <a:cs typeface="Courier New" panose="02070309020205020404" pitchFamily="49" charset="0"/>
@@ -6690,6 +6730,42 @@
           </a:p>
         </p:txBody>
       </p:sp>
+      <p:pic>
+        <p:nvPicPr>
+          <p:cNvPr id="4" name="Picture 3" descr="A red triangle on a black background&#10;&#10;AI-generated content may be incorrect.">
+            <a:extLst>
+              <a:ext uri="{FF2B5EF4-FFF2-40B4-BE49-F238E27FC236}">
+                <a16:creationId xmlns:a16="http://schemas.microsoft.com/office/drawing/2014/main" id="{EA7CE54B-6ED9-09AA-3329-3EB71BCD447E}"/>
+              </a:ext>
+            </a:extLst>
+          </p:cNvPr>
+          <p:cNvPicPr>
+            <a:picLocks noChangeAspect="1"/>
+          </p:cNvPicPr>
+          <p:nvPr/>
+        </p:nvPicPr>
+        <p:blipFill>
+          <a:blip r:embed="rId3">
+            <a:extLst>
+              <a:ext uri="{28A0092B-C50C-407E-A947-70E740481C1C}">
+                <a14:useLocalDpi xmlns:a14="http://schemas.microsoft.com/office/drawing/2010/main" val="0"/>
+              </a:ext>
+            </a:extLst>
+          </a:blip>
+          <a:stretch>
+            <a:fillRect/>
+          </a:stretch>
+        </p:blipFill>
+        <p:spPr>
+          <a:xfrm>
+            <a:off x="6841304" y="5039634"/>
+            <a:ext cx="421518" cy="421518"/>
+          </a:xfrm>
+          <a:prstGeom prst="rect">
+            <a:avLst/>
+          </a:prstGeom>
+        </p:spPr>
+      </p:pic>
     </p:spTree>
     <p:extLst>
       <p:ext uri="{BB962C8B-B14F-4D97-AF65-F5344CB8AC3E}">
@@ -7210,16 +7286,19 @@
               <a:rPr lang="en-US" dirty="0">
                 <a:cs typeface="Courier New" panose="02070309020205020404" pitchFamily="49" charset="0"/>
               </a:rPr>
-              <a:t>Cache results/data from tools calls for future look-ups</a:t>
-            </a:r>
-          </a:p>
-          <a:p>
-            <a:pPr lvl="1"/>
+              <a:t>Enhance </a:t>
+            </a:r>
+            <a:r>
+              <a:rPr lang="en-US" dirty="0" err="1">
+                <a:cs typeface="Courier New" panose="02070309020205020404" pitchFamily="49" charset="0"/>
+              </a:rPr>
+              <a:t>LangGraph</a:t>
+            </a:r>
             <a:r>
               <a:rPr lang="en-US" dirty="0">
                 <a:cs typeface="Courier New" panose="02070309020205020404" pitchFamily="49" charset="0"/>
               </a:rPr>
-              <a:t>Enhanced performance</a:t>
+              <a:t>: Handle parallel NE chains</a:t>
             </a:r>
           </a:p>
           <a:p>

--- a/Presentation.pptx
+++ b/Presentation.pptx
@@ -213,7 +213,7 @@
           <a:p>
             <a:fld id="{F214320D-9E3A-43B2-B232-402D78146534}" type="datetimeFigureOut">
               <a:rPr lang="en-CA" smtClean="0"/>
-              <a:t>2025-07-07</a:t>
+              <a:t>2025-07-11</a:t>
             </a:fld>
             <a:endParaRPr lang="en-CA"/>
           </a:p>
@@ -1390,7 +1390,7 @@
           <a:p>
             <a:fld id="{C128FA71-3A18-48C0-980F-4B68F7F63042}" type="datetime1">
               <a:rPr lang="en-US" smtClean="0"/>
-              <a:t>7/7/2025</a:t>
+              <a:t>7/11/2025</a:t>
             </a:fld>
             <a:endParaRPr lang="en-US"/>
           </a:p>
@@ -1598,7 +1598,7 @@
           <a:p>
             <a:fld id="{7104EDB3-C0E8-45F8-9E1D-1B6C8D1880C0}" type="datetime1">
               <a:rPr lang="en-US" smtClean="0"/>
-              <a:t>7/7/2025</a:t>
+              <a:t>7/11/2025</a:t>
             </a:fld>
             <a:endParaRPr lang="en-US"/>
           </a:p>
@@ -1808,7 +1808,7 @@
           <a:p>
             <a:fld id="{9CF0EC4B-54ED-4041-B552-9BA760FA3DBA}" type="datetime1">
               <a:rPr lang="en-US" smtClean="0"/>
-              <a:t>7/7/2025</a:t>
+              <a:t>7/11/2025</a:t>
             </a:fld>
             <a:endParaRPr lang="en-US"/>
           </a:p>
@@ -2006,7 +2006,7 @@
           <a:p>
             <a:fld id="{51C1210E-201E-4473-82AC-2466F5386C38}" type="datetime1">
               <a:rPr lang="en-US" smtClean="0"/>
-              <a:t>7/7/2025</a:t>
+              <a:t>7/11/2025</a:t>
             </a:fld>
             <a:endParaRPr lang="en-US"/>
           </a:p>
@@ -2284,7 +2284,7 @@
           <a:p>
             <a:fld id="{B01EA198-6CAB-4B8F-B93F-1F9C8C4B6CE7}" type="datetime1">
               <a:rPr lang="en-US" smtClean="0"/>
-              <a:t>7/7/2025</a:t>
+              <a:t>7/11/2025</a:t>
             </a:fld>
             <a:endParaRPr lang="en-US"/>
           </a:p>
@@ -2556,7 +2556,7 @@
           <a:p>
             <a:fld id="{CA06041F-4525-44D5-AA4F-332294BF1F56}" type="datetime1">
               <a:rPr lang="en-US" smtClean="0"/>
-              <a:t>7/7/2025</a:t>
+              <a:t>7/11/2025</a:t>
             </a:fld>
             <a:endParaRPr lang="en-US"/>
           </a:p>
@@ -2980,7 +2980,7 @@
           <a:p>
             <a:fld id="{F9557091-BBDF-4EB9-BA6B-2BB67AC4FC0F}" type="datetime1">
               <a:rPr lang="en-US" smtClean="0"/>
-              <a:t>7/7/2025</a:t>
+              <a:t>7/11/2025</a:t>
             </a:fld>
             <a:endParaRPr lang="en-US"/>
           </a:p>
@@ -3121,7 +3121,7 @@
           <a:p>
             <a:fld id="{2D6B226B-77A6-410C-9796-083F278E0125}" type="datetime1">
               <a:rPr lang="en-US" smtClean="0"/>
-              <a:t>7/7/2025</a:t>
+              <a:t>7/11/2025</a:t>
             </a:fld>
             <a:endParaRPr lang="en-US"/>
           </a:p>
@@ -3234,7 +3234,7 @@
           <a:p>
             <a:fld id="{A23A578B-D289-4C40-8593-3D356C49DA58}" type="datetime1">
               <a:rPr lang="en-US" smtClean="0"/>
-              <a:t>7/7/2025</a:t>
+              <a:t>7/11/2025</a:t>
             </a:fld>
             <a:endParaRPr lang="en-US"/>
           </a:p>
@@ -3553,7 +3553,7 @@
           <a:p>
             <a:fld id="{713DFAE3-14DB-48A7-A80F-80DDB072CE3D}" type="datetime1">
               <a:rPr lang="en-US" smtClean="0"/>
-              <a:t>7/7/2025</a:t>
+              <a:t>7/11/2025</a:t>
             </a:fld>
             <a:endParaRPr lang="en-US"/>
           </a:p>
@@ -3847,7 +3847,7 @@
           <a:p>
             <a:fld id="{92C5EAEF-6478-4102-8F5D-A5FE9FC97ACB}" type="datetime1">
               <a:rPr lang="en-US" smtClean="0"/>
-              <a:t>7/7/2025</a:t>
+              <a:t>7/11/2025</a:t>
             </a:fld>
             <a:endParaRPr lang="en-US"/>
           </a:p>
@@ -4088,7 +4088,7 @@
           <a:p>
             <a:fld id="{67F45AC6-C491-4585-A584-9CE2AF7D5500}" type="datetime1">
               <a:rPr lang="en-US" smtClean="0"/>
-              <a:t>7/7/2025</a:t>
+              <a:t>7/11/2025</a:t>
             </a:fld>
             <a:endParaRPr lang="en-US"/>
           </a:p>
@@ -6491,9 +6491,35 @@
               <a:rPr lang="en-US" dirty="0"/>
               <a:t>that Gemini and other advanced LLMs possess</a:t>
             </a:r>
-            <a:endParaRPr lang="en-US" dirty="0">
-              <a:cs typeface="Courier New" panose="02070309020205020404" pitchFamily="49" charset="0"/>
-            </a:endParaRPr>
+          </a:p>
+          <a:p>
+            <a:r>
+              <a:rPr lang="en-US" dirty="0">
+                <a:cs typeface="Courier New" panose="02070309020205020404" pitchFamily="49" charset="0"/>
+              </a:rPr>
+              <a:t>Simulation</a:t>
+            </a:r>
+          </a:p>
+          <a:p>
+            <a:pPr lvl="1"/>
+            <a:r>
+              <a:rPr lang="en-US" b="1" dirty="0">
+                <a:cs typeface="Courier New" panose="02070309020205020404" pitchFamily="49" charset="0"/>
+              </a:rPr>
+              <a:t>Added</a:t>
+            </a:r>
+            <a:r>
+              <a:rPr lang="en-US" dirty="0">
+                <a:cs typeface="Courier New" panose="02070309020205020404" pitchFamily="49" charset="0"/>
+              </a:rPr>
+              <a:t> alarm-feed simulation for controlled/repeatable </a:t>
+            </a:r>
+            <a:r>
+              <a:rPr lang="en-US" i="1" dirty="0">
+                <a:cs typeface="Courier New" panose="02070309020205020404" pitchFamily="49" charset="0"/>
+              </a:rPr>
+              <a:t>testing</a:t>
+            </a:r>
           </a:p>
           <a:p>
             <a:pPr lvl="1"/>
